--- a/submission/GCB/figures_SI/FigS5.pptx
+++ b/submission/GCB/figures_SI/FigS5.pptx
@@ -478,7 +478,7 @@
         </p:nvSpPr>
         <p:spPr>
           <a:xfrm>
-            <a:off x="1637280" y="2364120"/>
+            <a:off x="1637280" y="2363760"/>
             <a:ext cx="1788480" cy="0"/>
           </a:xfrm>
           <a:prstGeom prst="line">
@@ -521,7 +521,7 @@
         </p:nvSpPr>
         <p:spPr>
           <a:xfrm>
-            <a:off x="1637280" y="1845000"/>
+            <a:off x="1637280" y="1844280"/>
             <a:ext cx="1788480" cy="0"/>
           </a:xfrm>
           <a:prstGeom prst="line">
@@ -564,7 +564,7 @@
         </p:nvSpPr>
         <p:spPr>
           <a:xfrm>
-            <a:off x="1637280" y="1325880"/>
+            <a:off x="1637280" y="1325160"/>
             <a:ext cx="1788480" cy="0"/>
           </a:xfrm>
           <a:prstGeom prst="line">
@@ -667,8 +667,8 @@
         </p:nvSpPr>
         <p:spPr>
           <a:xfrm>
-            <a:off x="2363760" y="1603440"/>
-            <a:ext cx="335880" cy="1280160"/>
+            <a:off x="2363760" y="1603080"/>
+            <a:ext cx="335880" cy="1280520"/>
           </a:xfrm>
           <a:custGeom>
             <a:avLst/>
@@ -676,7 +676,7 @@
             <a:ahLst/>
             <a:rect l="0" t="0" r="r" b="b"/>
             <a:pathLst>
-              <a:path w="933" h="3556">
+              <a:path w="933" h="3557">
                 <a:moveTo>
                   <a:pt x="0" y="0"/>
                 </a:moveTo>
@@ -684,10 +684,10 @@
                   <a:pt x="933" y="0"/>
                 </a:lnTo>
                 <a:lnTo>
-                  <a:pt x="933" y="3556"/>
-                </a:lnTo>
-                <a:lnTo>
-                  <a:pt x="0" y="3556"/>
+                  <a:pt x="933" y="3557"/>
+                </a:lnTo>
+                <a:lnTo>
+                  <a:pt x="0" y="3557"/>
                 </a:lnTo>
                 <a:lnTo>
                   <a:pt x="0" y="0"/>
@@ -727,8 +727,8 @@
         </p:nvSpPr>
         <p:spPr>
           <a:xfrm>
-            <a:off x="2922840" y="1497960"/>
-            <a:ext cx="335520" cy="1385640"/>
+            <a:off x="2922840" y="1499400"/>
+            <a:ext cx="335520" cy="1384200"/>
           </a:xfrm>
           <a:custGeom>
             <a:avLst/>
@@ -736,7 +736,7 @@
             <a:ahLst/>
             <a:rect l="0" t="0" r="r" b="b"/>
             <a:pathLst>
-              <a:path w="932" h="3849">
+              <a:path w="932" h="3845">
                 <a:moveTo>
                   <a:pt x="0" y="0"/>
                 </a:moveTo>
@@ -744,10 +744,10 @@
                   <a:pt x="932" y="0"/>
                 </a:lnTo>
                 <a:lnTo>
-                  <a:pt x="932" y="3849"/>
-                </a:lnTo>
-                <a:lnTo>
-                  <a:pt x="0" y="3849"/>
+                  <a:pt x="932" y="3845"/>
+                </a:lnTo>
+                <a:lnTo>
+                  <a:pt x="0" y="3845"/>
                 </a:lnTo>
                 <a:lnTo>
                   <a:pt x="0" y="0"/>
@@ -814,7 +814,7 @@
                 <a:latin typeface="Arial"/>
                 <a:ea typeface="Arial"/>
               </a:rPr>
-              <a:t>302.21</a:t>
+              <a:t>302.06</a:t>
             </a:r>
             <a:endParaRPr lang="en-US" sz="710" b="0" u="none" strike="noStrike">
               <a:solidFill>
@@ -835,7 +835,7 @@
         </p:nvSpPr>
         <p:spPr>
           <a:xfrm>
-            <a:off x="2391840" y="1500840"/>
+            <a:off x="2391840" y="1500480"/>
             <a:ext cx="275760" cy="90360"/>
           </a:xfrm>
           <a:prstGeom prst="rect">
@@ -862,7 +862,7 @@
                 <a:latin typeface="Arial"/>
                 <a:ea typeface="Arial"/>
               </a:rPr>
-              <a:t>246.52</a:t>
+              <a:t>246.48</a:t>
             </a:r>
             <a:endParaRPr lang="en-US" sz="710" b="0" u="none" strike="noStrike">
               <a:solidFill>
@@ -943,7 +943,7 @@
         </p:nvSpPr>
         <p:spPr>
           <a:xfrm>
-            <a:off x="3596760" y="2323440"/>
+            <a:off x="3596760" y="2321640"/>
             <a:ext cx="1788120" cy="0"/>
           </a:xfrm>
           <a:prstGeom prst="line">
@@ -986,7 +986,7 @@
         </p:nvSpPr>
         <p:spPr>
           <a:xfrm>
-            <a:off x="3596760" y="1763640"/>
+            <a:off x="3596760" y="1759680"/>
             <a:ext cx="1788120" cy="0"/>
           </a:xfrm>
           <a:prstGeom prst="line">
@@ -1029,7 +1029,7 @@
         </p:nvSpPr>
         <p:spPr>
           <a:xfrm>
-            <a:off x="3596760" y="1203480"/>
+            <a:off x="3596760" y="1198080"/>
             <a:ext cx="1788120" cy="0"/>
           </a:xfrm>
           <a:prstGeom prst="line">
@@ -1132,8 +1132,8 @@
         </p:nvSpPr>
         <p:spPr>
           <a:xfrm>
-            <a:off x="4323240" y="2537280"/>
-            <a:ext cx="335520" cy="346320"/>
+            <a:off x="4323240" y="2537640"/>
+            <a:ext cx="335520" cy="345960"/>
           </a:xfrm>
           <a:custGeom>
             <a:avLst/>
@@ -1141,7 +1141,7 @@
             <a:ahLst/>
             <a:rect l="0" t="0" r="r" b="b"/>
             <a:pathLst>
-              <a:path w="932" h="962">
+              <a:path w="932" h="961">
                 <a:moveTo>
                   <a:pt x="0" y="0"/>
                 </a:moveTo>
@@ -1149,10 +1149,10 @@
                   <a:pt x="932" y="0"/>
                 </a:lnTo>
                 <a:lnTo>
-                  <a:pt x="932" y="962"/>
-                </a:lnTo>
-                <a:lnTo>
-                  <a:pt x="0" y="962"/>
+                  <a:pt x="932" y="961"/>
+                </a:lnTo>
+                <a:lnTo>
+                  <a:pt x="0" y="961"/>
                 </a:lnTo>
                 <a:lnTo>
                   <a:pt x="0" y="0"/>
@@ -1192,8 +1192,8 @@
         </p:nvSpPr>
         <p:spPr>
           <a:xfrm>
-            <a:off x="4881960" y="2458440"/>
-            <a:ext cx="335880" cy="425160"/>
+            <a:off x="4881960" y="2446200"/>
+            <a:ext cx="335880" cy="437400"/>
           </a:xfrm>
           <a:custGeom>
             <a:avLst/>
@@ -1201,7 +1201,7 @@
             <a:ahLst/>
             <a:rect l="0" t="0" r="r" b="b"/>
             <a:pathLst>
-              <a:path w="933" h="1181">
+              <a:path w="933" h="1215">
                 <a:moveTo>
                   <a:pt x="0" y="0"/>
                 </a:moveTo>
@@ -1209,10 +1209,10 @@
                   <a:pt x="933" y="0"/>
                 </a:lnTo>
                 <a:lnTo>
-                  <a:pt x="933" y="1181"/>
-                </a:lnTo>
-                <a:lnTo>
-                  <a:pt x="0" y="1181"/>
+                  <a:pt x="933" y="1215"/>
+                </a:lnTo>
+                <a:lnTo>
+                  <a:pt x="0" y="1215"/>
                 </a:lnTo>
                 <a:lnTo>
                   <a:pt x="0" y="0"/>
@@ -1252,7 +1252,7 @@
         </p:nvSpPr>
         <p:spPr>
           <a:xfrm>
-            <a:off x="3596760" y="2603520"/>
+            <a:off x="3596760" y="2602440"/>
             <a:ext cx="1788120" cy="0"/>
           </a:xfrm>
           <a:prstGeom prst="line">
@@ -1298,7 +1298,7 @@
         </p:nvSpPr>
         <p:spPr>
           <a:xfrm>
-            <a:off x="2950920" y="1395360"/>
+            <a:off x="2950920" y="1396800"/>
             <a:ext cx="275760" cy="90360"/>
           </a:xfrm>
           <a:prstGeom prst="rect">
@@ -1325,7 +1325,7 @@
                 <a:latin typeface="Arial"/>
                 <a:ea typeface="Arial"/>
               </a:rPr>
-              <a:t>266.80</a:t>
+              <a:t>266.42</a:t>
             </a:r>
             <a:endParaRPr lang="en-US" sz="710" b="0" u="none" strike="noStrike">
               <a:solidFill>
@@ -1373,7 +1373,7 @@
                 <a:latin typeface="Arial"/>
                 <a:ea typeface="Arial"/>
               </a:rPr>
-              <a:t>5.60</a:t>
+              <a:t>5.59</a:t>
             </a:r>
             <a:endParaRPr lang="en-US" sz="710" b="0" u="none" strike="noStrike">
               <a:solidFill>
@@ -1394,7 +1394,7 @@
         </p:nvSpPr>
         <p:spPr>
           <a:xfrm>
-            <a:off x="4402080" y="2434680"/>
+            <a:off x="4402080" y="2435040"/>
             <a:ext cx="175680" cy="90360"/>
           </a:xfrm>
           <a:prstGeom prst="rect">
@@ -1421,7 +1421,7 @@
                 <a:latin typeface="Arial"/>
                 <a:ea typeface="Arial"/>
               </a:rPr>
-              <a:t>1.24</a:t>
+              <a:t>1.23</a:t>
             </a:r>
             <a:endParaRPr lang="en-US" sz="710" b="0" u="none" strike="noStrike">
               <a:solidFill>
@@ -1485,7 +1485,7 @@
         </p:nvSpPr>
         <p:spPr>
           <a:xfrm>
-            <a:off x="4960800" y="2355840"/>
+            <a:off x="4960800" y="2343240"/>
             <a:ext cx="175680" cy="90360"/>
           </a:xfrm>
           <a:prstGeom prst="rect">
@@ -1512,7 +1512,7 @@
                 <a:latin typeface="Arial"/>
                 <a:ea typeface="Arial"/>
               </a:rPr>
-              <a:t>1.52</a:t>
+              <a:t>1.56</a:t>
             </a:r>
             <a:endParaRPr lang="en-US" sz="710" b="0" u="none" strike="noStrike">
               <a:solidFill>
@@ -1581,7 +1581,7 @@
         </p:nvSpPr>
         <p:spPr>
           <a:xfrm>
-            <a:off x="3489120" y="2272680"/>
+            <a:off x="3489120" y="2270880"/>
             <a:ext cx="101160" cy="102600"/>
           </a:xfrm>
           <a:prstGeom prst="rect">
@@ -1629,7 +1629,7 @@
         </p:nvSpPr>
         <p:spPr>
           <a:xfrm>
-            <a:off x="3489120" y="1712880"/>
+            <a:off x="3489120" y="1709280"/>
             <a:ext cx="101160" cy="102600"/>
           </a:xfrm>
           <a:prstGeom prst="rect">
@@ -1720,7 +1720,7 @@
         </p:nvSpPr>
         <p:spPr>
           <a:xfrm>
-            <a:off x="3565080" y="2323440"/>
+            <a:off x="3565080" y="2321640"/>
             <a:ext cx="31680" cy="0"/>
           </a:xfrm>
           <a:prstGeom prst="line">
@@ -1763,7 +1763,7 @@
         </p:nvSpPr>
         <p:spPr>
           <a:xfrm>
-            <a:off x="3565080" y="1763640"/>
+            <a:off x="3565080" y="1759680"/>
             <a:ext cx="31680" cy="0"/>
           </a:xfrm>
           <a:prstGeom prst="line">
@@ -1806,7 +1806,7 @@
         </p:nvSpPr>
         <p:spPr>
           <a:xfrm>
-            <a:off x="3565080" y="1203480"/>
+            <a:off x="3565080" y="1198080"/>
             <a:ext cx="31680" cy="0"/>
           </a:xfrm>
           <a:prstGeom prst="line">
@@ -1849,7 +1849,7 @@
         </p:nvSpPr>
         <p:spPr>
           <a:xfrm>
-            <a:off x="3489120" y="1153080"/>
+            <a:off x="3489120" y="1147320"/>
             <a:ext cx="101160" cy="102600"/>
           </a:xfrm>
           <a:prstGeom prst="rect">
@@ -2764,7 +2764,7 @@
         </p:nvSpPr>
         <p:spPr>
           <a:xfrm>
-            <a:off x="1428120" y="1794240"/>
+            <a:off x="1428120" y="1793880"/>
             <a:ext cx="171000" cy="102600"/>
           </a:xfrm>
           <a:prstGeom prst="rect">
@@ -2855,7 +2855,7 @@
         </p:nvSpPr>
         <p:spPr>
           <a:xfrm>
-            <a:off x="1605600" y="2364120"/>
+            <a:off x="1605600" y="2363760"/>
             <a:ext cx="31680" cy="0"/>
           </a:xfrm>
           <a:prstGeom prst="line">
@@ -2898,7 +2898,7 @@
         </p:nvSpPr>
         <p:spPr>
           <a:xfrm>
-            <a:off x="1605600" y="1845000"/>
+            <a:off x="1605600" y="1844280"/>
             <a:ext cx="31680" cy="0"/>
           </a:xfrm>
           <a:prstGeom prst="line">
@@ -2941,7 +2941,7 @@
         </p:nvSpPr>
         <p:spPr>
           <a:xfrm>
-            <a:off x="1605600" y="1325880"/>
+            <a:off x="1605600" y="1325160"/>
             <a:ext cx="31680" cy="0"/>
           </a:xfrm>
           <a:prstGeom prst="line">
@@ -2984,7 +2984,7 @@
         </p:nvSpPr>
         <p:spPr>
           <a:xfrm>
-            <a:off x="1428120" y="1275120"/>
+            <a:off x="1428120" y="1274400"/>
             <a:ext cx="171000" cy="102600"/>
           </a:xfrm>
           <a:prstGeom prst="rect">
@@ -3188,7 +3188,7 @@
         </p:nvSpPr>
         <p:spPr>
           <a:xfrm flipV="1">
-            <a:off x="8174520" y="1031760"/>
+            <a:off x="8163000" y="1031760"/>
             <a:ext cx="0" cy="1851480"/>
           </a:xfrm>
           <a:prstGeom prst="line">
@@ -3234,8 +3234,8 @@
         </p:nvSpPr>
         <p:spPr>
           <a:xfrm>
-            <a:off x="7747560" y="2703960"/>
-            <a:ext cx="631800" cy="0"/>
+            <a:off x="7739280" y="2405520"/>
+            <a:ext cx="635400" cy="0"/>
           </a:xfrm>
           <a:prstGeom prst="line">
             <a:avLst/>
@@ -3277,8 +3277,8 @@
         </p:nvSpPr>
         <p:spPr>
           <a:xfrm>
-            <a:off x="7661520" y="2405520"/>
-            <a:ext cx="833760" cy="0"/>
+            <a:off x="7627320" y="2703960"/>
+            <a:ext cx="856800" cy="0"/>
           </a:xfrm>
           <a:prstGeom prst="line">
             <a:avLst/>
@@ -3320,8 +3320,8 @@
         </p:nvSpPr>
         <p:spPr>
           <a:xfrm>
-            <a:off x="8194320" y="1211040"/>
-            <a:ext cx="557640" cy="0"/>
+            <a:off x="8183880" y="1211040"/>
+            <a:ext cx="564120" cy="0"/>
           </a:xfrm>
           <a:prstGeom prst="line">
             <a:avLst/>
@@ -3363,8 +3363,8 @@
         </p:nvSpPr>
         <p:spPr>
           <a:xfrm>
-            <a:off x="7907040" y="1808280"/>
-            <a:ext cx="766800" cy="0"/>
+            <a:off x="7902000" y="1808280"/>
+            <a:ext cx="765360" cy="0"/>
           </a:xfrm>
           <a:prstGeom prst="line">
             <a:avLst/>
@@ -3406,8 +3406,8 @@
         </p:nvSpPr>
         <p:spPr>
           <a:xfrm>
-            <a:off x="8095680" y="1509480"/>
-            <a:ext cx="561240" cy="0"/>
+            <a:off x="8083440" y="1509480"/>
+            <a:ext cx="557640" cy="0"/>
           </a:xfrm>
           <a:prstGeom prst="line">
             <a:avLst/>
@@ -3449,8 +3449,8 @@
         </p:nvSpPr>
         <p:spPr>
           <a:xfrm>
-            <a:off x="7946640" y="2106720"/>
-            <a:ext cx="435960" cy="0"/>
+            <a:off x="7936560" y="2106720"/>
+            <a:ext cx="433440" cy="0"/>
           </a:xfrm>
           <a:prstGeom prst="line">
             <a:avLst/>
@@ -3492,7 +3492,122 @@
         </p:nvSpPr>
         <p:spPr>
           <a:xfrm>
-            <a:off x="8032320" y="2673000"/>
+            <a:off x="8025840" y="2374200"/>
+            <a:ext cx="62640" cy="62640"/>
+          </a:xfrm>
+          <a:custGeom>
+            <a:avLst/>
+            <a:gdLst/>
+            <a:ahLst/>
+            <a:rect l="0" t="0" r="r" b="b"/>
+            <a:pathLst>
+              <a:path w="174" h="174">
+                <a:moveTo>
+                  <a:pt x="0" y="88"/>
+                </a:moveTo>
+                <a:cubicBezTo>
+                  <a:pt x="0" y="-29"/>
+                  <a:pt x="174" y="-29"/>
+                  <a:pt x="174" y="88"/>
+                </a:cubicBezTo>
+                <a:cubicBezTo>
+                  <a:pt x="174" y="203"/>
+                  <a:pt x="0" y="203"/>
+                  <a:pt x="0" y="88"/>
+                </a:cubicBezTo>
+                <a:close/>
+              </a:path>
+            </a:pathLst>
+          </a:custGeom>
+          <a:solidFill>
+            <a:srgbClr val="999999"/>
+          </a:solidFill>
+          <a:ln w="0">
+            <a:noFill/>
+          </a:ln>
+        </p:spPr>
+        <p:txBody>
+          <a:bodyPr lIns="0" tIns="0" rIns="0" bIns="0" anchor="t">
+            <a:noAutofit/>
+          </a:bodyPr>
+          <a:p>
+            <a:endParaRPr lang="en-US" sz="2400" b="0" u="none" strike="noStrike">
+              <a:solidFill>
+                <a:srgbClr val="FFFFFF"/>
+              </a:solidFill>
+              <a:effectLst/>
+              <a:uFillTx/>
+              <a:latin typeface="Times New Roman"/>
+            </a:endParaRPr>
+          </a:p>
+        </p:txBody>
+      </p:sp>
+      <p:sp>
+        <p:nvSpPr>
+          <p:cNvPr id="74" name=""/>
+          <p:cNvSpPr/>
+          <p:nvPr/>
+        </p:nvSpPr>
+        <p:spPr>
+          <a:xfrm>
+            <a:off x="8025840" y="2374200"/>
+            <a:ext cx="62640" cy="62640"/>
+          </a:xfrm>
+          <a:custGeom>
+            <a:avLst/>
+            <a:gdLst/>
+            <a:ahLst/>
+            <a:rect l="0" t="0" r="r" b="b"/>
+            <a:pathLst>
+              <a:path fill="none" w="174" h="174">
+                <a:moveTo>
+                  <a:pt x="174" y="88"/>
+                </a:moveTo>
+                <a:cubicBezTo>
+                  <a:pt x="174" y="203"/>
+                  <a:pt x="0" y="203"/>
+                  <a:pt x="0" y="88"/>
+                </a:cubicBezTo>
+                <a:cubicBezTo>
+                  <a:pt x="0" y="-29"/>
+                  <a:pt x="174" y="-29"/>
+                  <a:pt x="174" y="88"/>
+                </a:cubicBezTo>
+              </a:path>
+            </a:pathLst>
+          </a:custGeom>
+          <a:ln cap="rnd" w="7920">
+            <a:solidFill>
+              <a:srgbClr val="999999"/>
+            </a:solidFill>
+            <a:round/>
+          </a:ln>
+        </p:spPr>
+        <p:txBody>
+          <a:bodyPr lIns="3960" tIns="3960" rIns="3960" bIns="3960" anchor="t">
+            <a:noAutofit/>
+          </a:bodyPr>
+          <a:p>
+            <a:endParaRPr lang="en-US" sz="2400" b="0" u="none" strike="noStrike">
+              <a:solidFill>
+                <a:srgbClr val="000000"/>
+              </a:solidFill>
+              <a:effectLst/>
+              <a:uFillTx/>
+              <a:latin typeface="Times New Roman"/>
+            </a:endParaRPr>
+          </a:p>
+        </p:txBody>
+      </p:sp>
+      <p:sp>
+        <p:nvSpPr>
+          <p:cNvPr id="75" name=""/>
+          <p:cNvSpPr/>
+          <p:nvPr/>
+        </p:nvSpPr>
+        <p:spPr>
+          <a:xfrm>
+            <a:off x="8024760" y="2673000"/>
             <a:ext cx="62640" cy="62640"/>
           </a:xfrm>
           <a:custGeom>
@@ -3544,13 +3659,13 @@
       </p:sp>
       <p:sp>
         <p:nvSpPr>
-          <p:cNvPr id="74" name=""/>
-          <p:cNvSpPr/>
-          <p:nvPr/>
-        </p:nvSpPr>
-        <p:spPr>
-          <a:xfrm>
-            <a:off x="8032320" y="2673000"/>
+          <p:cNvPr id="76" name=""/>
+          <p:cNvSpPr/>
+          <p:nvPr/>
+        </p:nvSpPr>
+        <p:spPr>
+          <a:xfrm>
+            <a:off x="8024760" y="2673000"/>
             <a:ext cx="62640" cy="62640"/>
           </a:xfrm>
           <a:custGeom>
@@ -3601,128 +3716,13 @@
       </p:sp>
       <p:sp>
         <p:nvSpPr>
-          <p:cNvPr id="75" name=""/>
-          <p:cNvSpPr/>
-          <p:nvPr/>
-        </p:nvSpPr>
-        <p:spPr>
-          <a:xfrm>
-            <a:off x="8047080" y="2374200"/>
-            <a:ext cx="63000" cy="62640"/>
-          </a:xfrm>
-          <a:custGeom>
-            <a:avLst/>
-            <a:gdLst/>
-            <a:ahLst/>
-            <a:rect l="0" t="0" r="r" b="b"/>
-            <a:pathLst>
-              <a:path w="175" h="174">
-                <a:moveTo>
-                  <a:pt x="0" y="88"/>
-                </a:moveTo>
-                <a:cubicBezTo>
-                  <a:pt x="0" y="-29"/>
-                  <a:pt x="175" y="-29"/>
-                  <a:pt x="175" y="88"/>
-                </a:cubicBezTo>
-                <a:cubicBezTo>
-                  <a:pt x="175" y="203"/>
-                  <a:pt x="0" y="203"/>
-                  <a:pt x="0" y="88"/>
-                </a:cubicBezTo>
-                <a:close/>
-              </a:path>
-            </a:pathLst>
-          </a:custGeom>
-          <a:solidFill>
-            <a:srgbClr val="999999"/>
-          </a:solidFill>
-          <a:ln w="0">
-            <a:noFill/>
-          </a:ln>
-        </p:spPr>
-        <p:txBody>
-          <a:bodyPr lIns="0" tIns="0" rIns="0" bIns="0" anchor="t">
-            <a:noAutofit/>
-          </a:bodyPr>
-          <a:p>
-            <a:endParaRPr lang="en-US" sz="2400" b="0" u="none" strike="noStrike">
-              <a:solidFill>
-                <a:srgbClr val="FFFFFF"/>
-              </a:solidFill>
-              <a:effectLst/>
-              <a:uFillTx/>
-              <a:latin typeface="Times New Roman"/>
-            </a:endParaRPr>
-          </a:p>
-        </p:txBody>
-      </p:sp>
-      <p:sp>
-        <p:nvSpPr>
-          <p:cNvPr id="76" name=""/>
-          <p:cNvSpPr/>
-          <p:nvPr/>
-        </p:nvSpPr>
-        <p:spPr>
-          <a:xfrm>
-            <a:off x="8047080" y="2374200"/>
-            <a:ext cx="63000" cy="62640"/>
-          </a:xfrm>
-          <a:custGeom>
-            <a:avLst/>
-            <a:gdLst/>
-            <a:ahLst/>
-            <a:rect l="0" t="0" r="r" b="b"/>
-            <a:pathLst>
-              <a:path fill="none" w="175" h="174">
-                <a:moveTo>
-                  <a:pt x="175" y="88"/>
-                </a:moveTo>
-                <a:cubicBezTo>
-                  <a:pt x="175" y="203"/>
-                  <a:pt x="0" y="203"/>
-                  <a:pt x="0" y="88"/>
-                </a:cubicBezTo>
-                <a:cubicBezTo>
-                  <a:pt x="0" y="-29"/>
-                  <a:pt x="175" y="-29"/>
-                  <a:pt x="175" y="88"/>
-                </a:cubicBezTo>
-              </a:path>
-            </a:pathLst>
-          </a:custGeom>
-          <a:ln cap="rnd" w="7920">
-            <a:solidFill>
-              <a:srgbClr val="999999"/>
-            </a:solidFill>
-            <a:round/>
-          </a:ln>
-        </p:spPr>
-        <p:txBody>
-          <a:bodyPr lIns="3960" tIns="3960" rIns="3960" bIns="3960" anchor="t">
-            <a:noAutofit/>
-          </a:bodyPr>
-          <a:p>
-            <a:endParaRPr lang="en-US" sz="2400" b="0" u="none" strike="noStrike">
-              <a:solidFill>
-                <a:srgbClr val="000000"/>
-              </a:solidFill>
-              <a:effectLst/>
-              <a:uFillTx/>
-              <a:latin typeface="Times New Roman"/>
-            </a:endParaRPr>
-          </a:p>
-        </p:txBody>
-      </p:sp>
-      <p:sp>
-        <p:nvSpPr>
           <p:cNvPr id="77" name=""/>
           <p:cNvSpPr/>
           <p:nvPr/>
         </p:nvSpPr>
         <p:spPr>
           <a:xfrm>
-            <a:off x="8442000" y="1179720"/>
+            <a:off x="8434800" y="1179720"/>
             <a:ext cx="62640" cy="62640"/>
           </a:xfrm>
           <a:custGeom>
@@ -3780,7 +3780,7 @@
         </p:nvSpPr>
         <p:spPr>
           <a:xfrm>
-            <a:off x="8442000" y="1179720"/>
+            <a:off x="8434800" y="1179720"/>
             <a:ext cx="62640" cy="62640"/>
           </a:xfrm>
           <a:custGeom>
@@ -3837,7 +3837,7 @@
         </p:nvSpPr>
         <p:spPr>
           <a:xfrm>
-            <a:off x="8259120" y="1776960"/>
+            <a:off x="8253360" y="1776960"/>
             <a:ext cx="63000" cy="63000"/>
           </a:xfrm>
           <a:custGeom>
@@ -3895,7 +3895,7 @@
         </p:nvSpPr>
         <p:spPr>
           <a:xfrm>
-            <a:off x="8259120" y="1776960"/>
+            <a:off x="8253360" y="1776960"/>
             <a:ext cx="63000" cy="63000"/>
           </a:xfrm>
           <a:custGeom>
@@ -3952,7 +3952,7 @@
         </p:nvSpPr>
         <p:spPr>
           <a:xfrm>
-            <a:off x="8345160" y="1478520"/>
+            <a:off x="8331120" y="1478520"/>
             <a:ext cx="62640" cy="62640"/>
           </a:xfrm>
           <a:custGeom>
@@ -4010,7 +4010,7 @@
         </p:nvSpPr>
         <p:spPr>
           <a:xfrm>
-            <a:off x="8345160" y="1478520"/>
+            <a:off x="8331120" y="1478520"/>
             <a:ext cx="62640" cy="62640"/>
           </a:xfrm>
           <a:custGeom>
@@ -4067,7 +4067,846 @@
         </p:nvSpPr>
         <p:spPr>
           <a:xfrm>
-            <a:off x="8133480" y="2075760"/>
+            <a:off x="8121960" y="2075760"/>
+            <a:ext cx="63000" cy="62640"/>
+          </a:xfrm>
+          <a:custGeom>
+            <a:avLst/>
+            <a:gdLst/>
+            <a:ahLst/>
+            <a:rect l="0" t="0" r="r" b="b"/>
+            <a:pathLst>
+              <a:path w="175" h="174">
+                <a:moveTo>
+                  <a:pt x="0" y="87"/>
+                </a:moveTo>
+                <a:cubicBezTo>
+                  <a:pt x="0" y="-29"/>
+                  <a:pt x="175" y="-29"/>
+                  <a:pt x="175" y="87"/>
+                </a:cubicBezTo>
+                <a:cubicBezTo>
+                  <a:pt x="175" y="203"/>
+                  <a:pt x="0" y="203"/>
+                  <a:pt x="0" y="87"/>
+                </a:cubicBezTo>
+                <a:close/>
+              </a:path>
+            </a:pathLst>
+          </a:custGeom>
+          <a:solidFill>
+            <a:srgbClr val="999999"/>
+          </a:solidFill>
+          <a:ln w="0">
+            <a:noFill/>
+          </a:ln>
+        </p:spPr>
+        <p:txBody>
+          <a:bodyPr lIns="0" tIns="0" rIns="0" bIns="0" anchor="t">
+            <a:noAutofit/>
+          </a:bodyPr>
+          <a:p>
+            <a:endParaRPr lang="en-US" sz="2400" b="0" u="none" strike="noStrike">
+              <a:solidFill>
+                <a:srgbClr val="FFFFFF"/>
+              </a:solidFill>
+              <a:effectLst/>
+              <a:uFillTx/>
+              <a:latin typeface="Times New Roman"/>
+            </a:endParaRPr>
+          </a:p>
+        </p:txBody>
+      </p:sp>
+      <p:sp>
+        <p:nvSpPr>
+          <p:cNvPr id="84" name=""/>
+          <p:cNvSpPr/>
+          <p:nvPr/>
+        </p:nvSpPr>
+        <p:spPr>
+          <a:xfrm>
+            <a:off x="8121960" y="2075760"/>
+            <a:ext cx="63000" cy="62640"/>
+          </a:xfrm>
+          <a:custGeom>
+            <a:avLst/>
+            <a:gdLst/>
+            <a:ahLst/>
+            <a:rect l="0" t="0" r="r" b="b"/>
+            <a:pathLst>
+              <a:path fill="none" w="175" h="174">
+                <a:moveTo>
+                  <a:pt x="175" y="87"/>
+                </a:moveTo>
+                <a:cubicBezTo>
+                  <a:pt x="175" y="203"/>
+                  <a:pt x="0" y="203"/>
+                  <a:pt x="0" y="87"/>
+                </a:cubicBezTo>
+                <a:cubicBezTo>
+                  <a:pt x="0" y="-29"/>
+                  <a:pt x="175" y="-29"/>
+                  <a:pt x="175" y="87"/>
+                </a:cubicBezTo>
+              </a:path>
+            </a:pathLst>
+          </a:custGeom>
+          <a:ln cap="rnd" w="7920">
+            <a:solidFill>
+              <a:srgbClr val="999999"/>
+            </a:solidFill>
+            <a:round/>
+          </a:ln>
+        </p:spPr>
+        <p:txBody>
+          <a:bodyPr lIns="3960" tIns="3960" rIns="3960" bIns="3960" anchor="t">
+            <a:noAutofit/>
+          </a:bodyPr>
+          <a:p>
+            <a:endParaRPr lang="en-US" sz="2400" b="0" u="none" strike="noStrike">
+              <a:solidFill>
+                <a:srgbClr val="000000"/>
+              </a:solidFill>
+              <a:effectLst/>
+              <a:uFillTx/>
+              <a:latin typeface="Times New Roman"/>
+            </a:endParaRPr>
+          </a:p>
+        </p:txBody>
+      </p:sp>
+      <p:sp>
+        <p:nvSpPr>
+          <p:cNvPr id="85" name=""/>
+          <p:cNvSpPr txBox="1"/>
+          <p:nvPr/>
+        </p:nvSpPr>
+        <p:spPr>
+          <a:xfrm>
+            <a:off x="152280" y="127800"/>
+            <a:ext cx="164880" cy="164880"/>
+          </a:xfrm>
+          <a:prstGeom prst="rect">
+            <a:avLst/>
+          </a:prstGeom>
+          <a:noFill/>
+          <a:ln w="0">
+            <a:noFill/>
+          </a:ln>
+        </p:spPr>
+        <p:txBody>
+          <a:bodyPr wrap="none" lIns="0" tIns="0" rIns="0" bIns="0" anchor="t">
+            <a:spAutoFit/>
+          </a:bodyPr>
+          <a:p>
+            <a:pPr/>
+            <a:r>
+              <a:rPr lang="en-US" sz="1300" b="1" u="none" strike="noStrike">
+                <a:solidFill>
+                  <a:srgbClr val="000000"/>
+                </a:solidFill>
+                <a:effectLst/>
+                <a:uFillTx/>
+                <a:latin typeface="Arial"/>
+                <a:ea typeface="Arial"/>
+              </a:rPr>
+              <a:t>a</a:t>
+            </a:r>
+            <a:endParaRPr lang="en-US" sz="1300" b="0" u="none" strike="noStrike">
+              <a:solidFill>
+                <a:srgbClr val="000000"/>
+              </a:solidFill>
+              <a:effectLst/>
+              <a:uFillTx/>
+              <a:latin typeface="Times New Roman"/>
+            </a:endParaRPr>
+          </a:p>
+        </p:txBody>
+      </p:sp>
+      <p:sp>
+        <p:nvSpPr>
+          <p:cNvPr id="86" name=""/>
+          <p:cNvSpPr txBox="1"/>
+          <p:nvPr/>
+        </p:nvSpPr>
+        <p:spPr>
+          <a:xfrm>
+            <a:off x="7987320" y="2282040"/>
+            <a:ext cx="154800" cy="79560"/>
+          </a:xfrm>
+          <a:prstGeom prst="rect">
+            <a:avLst/>
+          </a:prstGeom>
+          <a:noFill/>
+          <a:ln w="0">
+            <a:noFill/>
+          </a:ln>
+        </p:spPr>
+        <p:txBody>
+          <a:bodyPr wrap="none" lIns="0" tIns="0" rIns="0" bIns="0" anchor="t">
+            <a:spAutoFit/>
+          </a:bodyPr>
+          <a:p>
+            <a:pPr/>
+            <a:r>
+              <a:rPr lang="en-US" sz="620" b="0" u="none" strike="noStrike">
+                <a:solidFill>
+                  <a:srgbClr val="404040"/>
+                </a:solidFill>
+                <a:effectLst/>
+                <a:uFillTx/>
+                <a:latin typeface="Arial"/>
+                <a:ea typeface="Arial"/>
+              </a:rPr>
+              <a:t>0.92</a:t>
+            </a:r>
+            <a:endParaRPr lang="en-US" sz="620" b="0" u="none" strike="noStrike">
+              <a:solidFill>
+                <a:srgbClr val="000000"/>
+              </a:solidFill>
+              <a:effectLst/>
+              <a:uFillTx/>
+              <a:latin typeface="Times New Roman"/>
+            </a:endParaRPr>
+          </a:p>
+        </p:txBody>
+      </p:sp>
+      <p:sp>
+        <p:nvSpPr>
+          <p:cNvPr id="87" name=""/>
+          <p:cNvSpPr txBox="1"/>
+          <p:nvPr/>
+        </p:nvSpPr>
+        <p:spPr>
+          <a:xfrm>
+            <a:off x="7986240" y="2580480"/>
+            <a:ext cx="154800" cy="79560"/>
+          </a:xfrm>
+          <a:prstGeom prst="rect">
+            <a:avLst/>
+          </a:prstGeom>
+          <a:noFill/>
+          <a:ln w="0">
+            <a:noFill/>
+          </a:ln>
+        </p:spPr>
+        <p:txBody>
+          <a:bodyPr wrap="none" lIns="0" tIns="0" rIns="0" bIns="0" anchor="t">
+            <a:spAutoFit/>
+          </a:bodyPr>
+          <a:p>
+            <a:pPr/>
+            <a:r>
+              <a:rPr lang="en-US" sz="620" b="0" u="none" strike="noStrike">
+                <a:solidFill>
+                  <a:srgbClr val="404040"/>
+                </a:solidFill>
+                <a:effectLst/>
+                <a:uFillTx/>
+                <a:latin typeface="Arial"/>
+                <a:ea typeface="Arial"/>
+              </a:rPr>
+              <a:t>0.92</a:t>
+            </a:r>
+            <a:endParaRPr lang="en-US" sz="620" b="0" u="none" strike="noStrike">
+              <a:solidFill>
+                <a:srgbClr val="000000"/>
+              </a:solidFill>
+              <a:effectLst/>
+              <a:uFillTx/>
+              <a:latin typeface="Times New Roman"/>
+            </a:endParaRPr>
+          </a:p>
+        </p:txBody>
+      </p:sp>
+      <p:sp>
+        <p:nvSpPr>
+          <p:cNvPr id="88" name=""/>
+          <p:cNvSpPr txBox="1"/>
+          <p:nvPr/>
+        </p:nvSpPr>
+        <p:spPr>
+          <a:xfrm>
+            <a:off x="8396280" y="1087560"/>
+            <a:ext cx="154800" cy="79560"/>
+          </a:xfrm>
+          <a:prstGeom prst="rect">
+            <a:avLst/>
+          </a:prstGeom>
+          <a:noFill/>
+          <a:ln w="0">
+            <a:noFill/>
+          </a:ln>
+        </p:spPr>
+        <p:txBody>
+          <a:bodyPr wrap="none" lIns="0" tIns="0" rIns="0" bIns="0" anchor="t">
+            <a:spAutoFit/>
+          </a:bodyPr>
+          <a:p>
+            <a:pPr/>
+            <a:r>
+              <a:rPr lang="en-US" sz="620" b="0" u="none" strike="noStrike">
+                <a:solidFill>
+                  <a:srgbClr val="404040"/>
+                </a:solidFill>
+                <a:effectLst/>
+                <a:uFillTx/>
+                <a:latin typeface="Arial"/>
+                <a:ea typeface="Arial"/>
+              </a:rPr>
+              <a:t>1.27</a:t>
+            </a:r>
+            <a:endParaRPr lang="en-US" sz="620" b="0" u="none" strike="noStrike">
+              <a:solidFill>
+                <a:srgbClr val="000000"/>
+              </a:solidFill>
+              <a:effectLst/>
+              <a:uFillTx/>
+              <a:latin typeface="Times New Roman"/>
+            </a:endParaRPr>
+          </a:p>
+        </p:txBody>
+      </p:sp>
+      <p:sp>
+        <p:nvSpPr>
+          <p:cNvPr id="89" name=""/>
+          <p:cNvSpPr txBox="1"/>
+          <p:nvPr/>
+        </p:nvSpPr>
+        <p:spPr>
+          <a:xfrm>
+            <a:off x="8215200" y="1684800"/>
+            <a:ext cx="154800" cy="79560"/>
+          </a:xfrm>
+          <a:prstGeom prst="rect">
+            <a:avLst/>
+          </a:prstGeom>
+          <a:noFill/>
+          <a:ln w="0">
+            <a:noFill/>
+          </a:ln>
+        </p:spPr>
+        <p:txBody>
+          <a:bodyPr wrap="none" lIns="0" tIns="0" rIns="0" bIns="0" anchor="t">
+            <a:spAutoFit/>
+          </a:bodyPr>
+          <a:p>
+            <a:pPr/>
+            <a:r>
+              <a:rPr lang="en-US" sz="620" b="0" u="none" strike="noStrike">
+                <a:solidFill>
+                  <a:srgbClr val="404040"/>
+                </a:solidFill>
+                <a:effectLst/>
+                <a:uFillTx/>
+                <a:latin typeface="Arial"/>
+                <a:ea typeface="Arial"/>
+              </a:rPr>
+              <a:t>1.10</a:t>
+            </a:r>
+            <a:endParaRPr lang="en-US" sz="620" b="0" u="none" strike="noStrike">
+              <a:solidFill>
+                <a:srgbClr val="000000"/>
+              </a:solidFill>
+              <a:effectLst/>
+              <a:uFillTx/>
+              <a:latin typeface="Times New Roman"/>
+            </a:endParaRPr>
+          </a:p>
+        </p:txBody>
+      </p:sp>
+      <p:sp>
+        <p:nvSpPr>
+          <p:cNvPr id="90" name=""/>
+          <p:cNvSpPr txBox="1"/>
+          <p:nvPr/>
+        </p:nvSpPr>
+        <p:spPr>
+          <a:xfrm>
+            <a:off x="8292600" y="1386000"/>
+            <a:ext cx="154800" cy="79560"/>
+          </a:xfrm>
+          <a:prstGeom prst="rect">
+            <a:avLst/>
+          </a:prstGeom>
+          <a:noFill/>
+          <a:ln w="0">
+            <a:noFill/>
+          </a:ln>
+        </p:spPr>
+        <p:txBody>
+          <a:bodyPr wrap="none" lIns="0" tIns="0" rIns="0" bIns="0" anchor="t">
+            <a:spAutoFit/>
+          </a:bodyPr>
+          <a:p>
+            <a:pPr/>
+            <a:r>
+              <a:rPr lang="en-US" sz="620" b="0" u="none" strike="noStrike">
+                <a:solidFill>
+                  <a:srgbClr val="404040"/>
+                </a:solidFill>
+                <a:effectLst/>
+                <a:uFillTx/>
+                <a:latin typeface="Arial"/>
+                <a:ea typeface="Arial"/>
+              </a:rPr>
+              <a:t>1.17</a:t>
+            </a:r>
+            <a:endParaRPr lang="en-US" sz="620" b="0" u="none" strike="noStrike">
+              <a:solidFill>
+                <a:srgbClr val="000000"/>
+              </a:solidFill>
+              <a:effectLst/>
+              <a:uFillTx/>
+              <a:latin typeface="Times New Roman"/>
+            </a:endParaRPr>
+          </a:p>
+        </p:txBody>
+      </p:sp>
+      <p:sp>
+        <p:nvSpPr>
+          <p:cNvPr id="91" name=""/>
+          <p:cNvSpPr/>
+          <p:nvPr/>
+        </p:nvSpPr>
+        <p:spPr>
+          <a:xfrm>
+            <a:off x="8959680" y="1031760"/>
+            <a:ext cx="1842480" cy="1851840"/>
+          </a:xfrm>
+          <a:custGeom>
+            <a:avLst/>
+            <a:gdLst/>
+            <a:ahLst/>
+            <a:rect l="0" t="0" r="r" b="b"/>
+            <a:pathLst>
+              <a:path w="5118" h="5144">
+                <a:moveTo>
+                  <a:pt x="0" y="0"/>
+                </a:moveTo>
+                <a:lnTo>
+                  <a:pt x="5118" y="0"/>
+                </a:lnTo>
+                <a:lnTo>
+                  <a:pt x="5118" y="5144"/>
+                </a:lnTo>
+                <a:lnTo>
+                  <a:pt x="0" y="5144"/>
+                </a:lnTo>
+                <a:lnTo>
+                  <a:pt x="0" y="0"/>
+                </a:lnTo>
+                <a:close/>
+              </a:path>
+            </a:pathLst>
+          </a:custGeom>
+          <a:solidFill>
+            <a:srgbClr val="FFFFFF"/>
+          </a:solidFill>
+          <a:ln w="0">
+            <a:noFill/>
+          </a:ln>
+        </p:spPr>
+        <p:txBody>
+          <a:bodyPr lIns="0" tIns="0" rIns="0" bIns="0" anchor="t">
+            <a:noAutofit/>
+          </a:bodyPr>
+          <a:p>
+            <a:endParaRPr lang="en-US" sz="2400" b="0" u="none" strike="noStrike">
+              <a:solidFill>
+                <a:srgbClr val="000000"/>
+              </a:solidFill>
+              <a:effectLst/>
+              <a:uFillTx/>
+              <a:latin typeface="Times New Roman"/>
+            </a:endParaRPr>
+          </a:p>
+        </p:txBody>
+      </p:sp>
+      <p:sp>
+        <p:nvSpPr>
+          <p:cNvPr id="92" name=""/>
+          <p:cNvSpPr/>
+          <p:nvPr/>
+        </p:nvSpPr>
+        <p:spPr>
+          <a:xfrm flipV="1">
+            <a:off x="10068480" y="1031760"/>
+            <a:ext cx="0" cy="1851480"/>
+          </a:xfrm>
+          <a:prstGeom prst="line">
+            <a:avLst/>
+          </a:prstGeom>
+          <a:ln w="9360">
+            <a:solidFill>
+              <a:srgbClr val="8C8C8C"/>
+            </a:solidFill>
+            <a:custDash>
+              <a:ds d="403846" sp="403846"/>
+            </a:custDash>
+            <a:round/>
+          </a:ln>
+        </p:spPr>
+        <p:style>
+          <a:lnRef idx="0"/>
+          <a:fillRef idx="0"/>
+          <a:effectRef idx="0"/>
+          <a:fontRef idx="minor"/>
+        </p:style>
+        <p:txBody>
+          <a:bodyPr lIns="4680" tIns="4680" rIns="4680" bIns="4680" anchor="t">
+            <a:noAutofit/>
+          </a:bodyPr>
+          <a:p>
+            <a:endParaRPr lang="en-US" sz="2400" b="0" u="none" strike="noStrike">
+              <a:solidFill>
+                <a:srgbClr val="000000"/>
+              </a:solidFill>
+              <a:effectLst/>
+              <a:uFillTx/>
+              <a:latin typeface="Times New Roman"/>
+            </a:endParaRPr>
+          </a:p>
+        </p:txBody>
+      </p:sp>
+      <p:sp>
+        <p:nvSpPr>
+          <p:cNvPr id="93" name=""/>
+          <p:cNvSpPr/>
+          <p:nvPr/>
+        </p:nvSpPr>
+        <p:spPr>
+          <a:xfrm>
+            <a:off x="9236160" y="2405520"/>
+            <a:ext cx="770760" cy="0"/>
+          </a:xfrm>
+          <a:prstGeom prst="line">
+            <a:avLst/>
+          </a:prstGeom>
+          <a:ln w="14760">
+            <a:solidFill>
+              <a:srgbClr val="D55E00"/>
+            </a:solidFill>
+            <a:round/>
+          </a:ln>
+        </p:spPr>
+        <p:style>
+          <a:lnRef idx="0"/>
+          <a:fillRef idx="0"/>
+          <a:effectRef idx="0"/>
+          <a:fontRef idx="minor"/>
+        </p:style>
+        <p:txBody>
+          <a:bodyPr lIns="7200" tIns="-7200" rIns="7200" bIns="-7200" anchor="t">
+            <a:noAutofit/>
+          </a:bodyPr>
+          <a:p>
+            <a:endParaRPr lang="en-US" sz="2400" b="0" u="none" strike="noStrike">
+              <a:solidFill>
+                <a:srgbClr val="000000"/>
+              </a:solidFill>
+              <a:effectLst/>
+              <a:uFillTx/>
+              <a:latin typeface="Times New Roman"/>
+            </a:endParaRPr>
+          </a:p>
+        </p:txBody>
+      </p:sp>
+      <p:sp>
+        <p:nvSpPr>
+          <p:cNvPr id="94" name=""/>
+          <p:cNvSpPr/>
+          <p:nvPr/>
+        </p:nvSpPr>
+        <p:spPr>
+          <a:xfrm>
+            <a:off x="9533160" y="1211040"/>
+            <a:ext cx="736200" cy="0"/>
+          </a:xfrm>
+          <a:prstGeom prst="line">
+            <a:avLst/>
+          </a:prstGeom>
+          <a:ln w="14760">
+            <a:solidFill>
+              <a:srgbClr val="999999"/>
+            </a:solidFill>
+            <a:round/>
+          </a:ln>
+        </p:spPr>
+        <p:style>
+          <a:lnRef idx="0"/>
+          <a:fillRef idx="0"/>
+          <a:effectRef idx="0"/>
+          <a:fontRef idx="minor"/>
+        </p:style>
+        <p:txBody>
+          <a:bodyPr lIns="7200" tIns="-7200" rIns="7200" bIns="-7200" anchor="t">
+            <a:noAutofit/>
+          </a:bodyPr>
+          <a:p>
+            <a:endParaRPr lang="en-US" sz="2400" b="0" u="none" strike="noStrike">
+              <a:solidFill>
+                <a:srgbClr val="000000"/>
+              </a:solidFill>
+              <a:effectLst/>
+              <a:uFillTx/>
+              <a:latin typeface="Times New Roman"/>
+            </a:endParaRPr>
+          </a:p>
+        </p:txBody>
+      </p:sp>
+      <p:sp>
+        <p:nvSpPr>
+          <p:cNvPr id="95" name=""/>
+          <p:cNvSpPr/>
+          <p:nvPr/>
+        </p:nvSpPr>
+        <p:spPr>
+          <a:xfrm>
+            <a:off x="9043200" y="1808280"/>
+            <a:ext cx="808920" cy="0"/>
+          </a:xfrm>
+          <a:prstGeom prst="line">
+            <a:avLst/>
+          </a:prstGeom>
+          <a:ln w="14760">
+            <a:solidFill>
+              <a:srgbClr val="D55E00"/>
+            </a:solidFill>
+            <a:round/>
+          </a:ln>
+        </p:spPr>
+        <p:style>
+          <a:lnRef idx="0"/>
+          <a:fillRef idx="0"/>
+          <a:effectRef idx="0"/>
+          <a:fontRef idx="minor"/>
+        </p:style>
+        <p:txBody>
+          <a:bodyPr lIns="7200" tIns="-7200" rIns="7200" bIns="-7200" anchor="t">
+            <a:noAutofit/>
+          </a:bodyPr>
+          <a:p>
+            <a:endParaRPr lang="en-US" sz="2400" b="0" u="none" strike="noStrike">
+              <a:solidFill>
+                <a:srgbClr val="000000"/>
+              </a:solidFill>
+              <a:effectLst/>
+              <a:uFillTx/>
+              <a:latin typeface="Times New Roman"/>
+            </a:endParaRPr>
+          </a:p>
+        </p:txBody>
+      </p:sp>
+      <p:sp>
+        <p:nvSpPr>
+          <p:cNvPr id="96" name=""/>
+          <p:cNvSpPr/>
+          <p:nvPr/>
+        </p:nvSpPr>
+        <p:spPr>
+          <a:xfrm>
+            <a:off x="9921240" y="1509480"/>
+            <a:ext cx="796680" cy="0"/>
+          </a:xfrm>
+          <a:prstGeom prst="line">
+            <a:avLst/>
+          </a:prstGeom>
+          <a:ln w="14760">
+            <a:solidFill>
+              <a:srgbClr val="999999"/>
+            </a:solidFill>
+            <a:round/>
+          </a:ln>
+        </p:spPr>
+        <p:style>
+          <a:lnRef idx="0"/>
+          <a:fillRef idx="0"/>
+          <a:effectRef idx="0"/>
+          <a:fontRef idx="minor"/>
+        </p:style>
+        <p:txBody>
+          <a:bodyPr lIns="7200" tIns="-7200" rIns="7200" bIns="-7200" anchor="t">
+            <a:noAutofit/>
+          </a:bodyPr>
+          <a:p>
+            <a:endParaRPr lang="en-US" sz="2400" b="0" u="none" strike="noStrike">
+              <a:solidFill>
+                <a:srgbClr val="000000"/>
+              </a:solidFill>
+              <a:effectLst/>
+              <a:uFillTx/>
+              <a:latin typeface="Times New Roman"/>
+            </a:endParaRPr>
+          </a:p>
+        </p:txBody>
+      </p:sp>
+      <p:sp>
+        <p:nvSpPr>
+          <p:cNvPr id="97" name=""/>
+          <p:cNvSpPr/>
+          <p:nvPr/>
+        </p:nvSpPr>
+        <p:spPr>
+          <a:xfrm>
+            <a:off x="9797040" y="2106720"/>
+            <a:ext cx="622800" cy="0"/>
+          </a:xfrm>
+          <a:prstGeom prst="line">
+            <a:avLst/>
+          </a:prstGeom>
+          <a:ln w="14760">
+            <a:solidFill>
+              <a:srgbClr val="999999"/>
+            </a:solidFill>
+            <a:round/>
+          </a:ln>
+        </p:spPr>
+        <p:style>
+          <a:lnRef idx="0"/>
+          <a:fillRef idx="0"/>
+          <a:effectRef idx="0"/>
+          <a:fontRef idx="minor"/>
+        </p:style>
+        <p:txBody>
+          <a:bodyPr lIns="7200" tIns="-7200" rIns="7200" bIns="-7200" anchor="t">
+            <a:noAutofit/>
+          </a:bodyPr>
+          <a:p>
+            <a:endParaRPr lang="en-US" sz="2400" b="0" u="none" strike="noStrike">
+              <a:solidFill>
+                <a:srgbClr val="000000"/>
+              </a:solidFill>
+              <a:effectLst/>
+              <a:uFillTx/>
+              <a:latin typeface="Times New Roman"/>
+            </a:endParaRPr>
+          </a:p>
+        </p:txBody>
+      </p:sp>
+      <p:sp>
+        <p:nvSpPr>
+          <p:cNvPr id="98" name=""/>
+          <p:cNvSpPr/>
+          <p:nvPr/>
+        </p:nvSpPr>
+        <p:spPr>
+          <a:xfrm>
+            <a:off x="9590400" y="2374200"/>
+            <a:ext cx="62640" cy="62640"/>
+          </a:xfrm>
+          <a:custGeom>
+            <a:avLst/>
+            <a:gdLst/>
+            <a:ahLst/>
+            <a:rect l="0" t="0" r="r" b="b"/>
+            <a:pathLst>
+              <a:path w="174" h="174">
+                <a:moveTo>
+                  <a:pt x="0" y="88"/>
+                </a:moveTo>
+                <a:cubicBezTo>
+                  <a:pt x="0" y="-29"/>
+                  <a:pt x="174" y="-29"/>
+                  <a:pt x="174" y="88"/>
+                </a:cubicBezTo>
+                <a:cubicBezTo>
+                  <a:pt x="174" y="203"/>
+                  <a:pt x="0" y="203"/>
+                  <a:pt x="0" y="88"/>
+                </a:cubicBezTo>
+                <a:close/>
+              </a:path>
+            </a:pathLst>
+          </a:custGeom>
+          <a:solidFill>
+            <a:srgbClr val="D55E00"/>
+          </a:solidFill>
+          <a:ln w="0">
+            <a:noFill/>
+          </a:ln>
+        </p:spPr>
+        <p:txBody>
+          <a:bodyPr lIns="0" tIns="0" rIns="0" bIns="0" anchor="t">
+            <a:noAutofit/>
+          </a:bodyPr>
+          <a:p>
+            <a:endParaRPr lang="en-US" sz="2400" b="0" u="none" strike="noStrike">
+              <a:solidFill>
+                <a:srgbClr val="FFFFFF"/>
+              </a:solidFill>
+              <a:effectLst/>
+              <a:uFillTx/>
+              <a:latin typeface="Times New Roman"/>
+            </a:endParaRPr>
+          </a:p>
+        </p:txBody>
+      </p:sp>
+      <p:sp>
+        <p:nvSpPr>
+          <p:cNvPr id="99" name=""/>
+          <p:cNvSpPr/>
+          <p:nvPr/>
+        </p:nvSpPr>
+        <p:spPr>
+          <a:xfrm>
+            <a:off x="9590400" y="2374200"/>
+            <a:ext cx="62640" cy="62640"/>
+          </a:xfrm>
+          <a:custGeom>
+            <a:avLst/>
+            <a:gdLst/>
+            <a:ahLst/>
+            <a:rect l="0" t="0" r="r" b="b"/>
+            <a:pathLst>
+              <a:path fill="none" w="174" h="174">
+                <a:moveTo>
+                  <a:pt x="174" y="88"/>
+                </a:moveTo>
+                <a:cubicBezTo>
+                  <a:pt x="174" y="203"/>
+                  <a:pt x="0" y="203"/>
+                  <a:pt x="0" y="88"/>
+                </a:cubicBezTo>
+                <a:cubicBezTo>
+                  <a:pt x="0" y="-29"/>
+                  <a:pt x="174" y="-29"/>
+                  <a:pt x="174" y="88"/>
+                </a:cubicBezTo>
+              </a:path>
+            </a:pathLst>
+          </a:custGeom>
+          <a:ln cap="rnd" w="7920">
+            <a:solidFill>
+              <a:srgbClr val="D55E00"/>
+            </a:solidFill>
+            <a:round/>
+          </a:ln>
+        </p:spPr>
+        <p:txBody>
+          <a:bodyPr lIns="3960" tIns="3960" rIns="3960" bIns="3960" anchor="t">
+            <a:noAutofit/>
+          </a:bodyPr>
+          <a:p>
+            <a:endParaRPr lang="en-US" sz="2400" b="0" u="none" strike="noStrike">
+              <a:solidFill>
+                <a:srgbClr val="000000"/>
+              </a:solidFill>
+              <a:effectLst/>
+              <a:uFillTx/>
+              <a:latin typeface="Times New Roman"/>
+            </a:endParaRPr>
+          </a:p>
+        </p:txBody>
+      </p:sp>
+      <p:sp>
+        <p:nvSpPr>
+          <p:cNvPr id="100" name=""/>
+          <p:cNvSpPr/>
+          <p:nvPr/>
+        </p:nvSpPr>
+        <p:spPr>
+          <a:xfrm>
+            <a:off x="9870120" y="1179720"/>
             <a:ext cx="62640" cy="62640"/>
           </a:xfrm>
           <a:custGeom>
@@ -4119,13 +4958,13 @@
       </p:sp>
       <p:sp>
         <p:nvSpPr>
-          <p:cNvPr id="84" name=""/>
-          <p:cNvSpPr/>
-          <p:nvPr/>
-        </p:nvSpPr>
-        <p:spPr>
-          <a:xfrm>
-            <a:off x="8133480" y="2075760"/>
+          <p:cNvPr id="101" name=""/>
+          <p:cNvSpPr/>
+          <p:nvPr/>
+        </p:nvSpPr>
+        <p:spPr>
+          <a:xfrm>
+            <a:off x="9870120" y="1179720"/>
             <a:ext cx="62640" cy="62640"/>
           </a:xfrm>
           <a:custGeom>
@@ -4176,852 +5015,13 @@
       </p:sp>
       <p:sp>
         <p:nvSpPr>
-          <p:cNvPr id="85" name=""/>
-          <p:cNvSpPr txBox="1"/>
-          <p:nvPr/>
-        </p:nvSpPr>
-        <p:spPr>
-          <a:xfrm>
-            <a:off x="152280" y="127800"/>
-            <a:ext cx="164880" cy="164880"/>
-          </a:xfrm>
-          <a:prstGeom prst="rect">
-            <a:avLst/>
-          </a:prstGeom>
-          <a:noFill/>
-          <a:ln w="0">
-            <a:noFill/>
-          </a:ln>
-        </p:spPr>
-        <p:txBody>
-          <a:bodyPr wrap="none" lIns="0" tIns="0" rIns="0" bIns="0" anchor="t">
-            <a:spAutoFit/>
-          </a:bodyPr>
-          <a:p>
-            <a:pPr/>
-            <a:r>
-              <a:rPr lang="en-US" sz="1300" b="1" u="none" strike="noStrike">
-                <a:solidFill>
-                  <a:srgbClr val="000000"/>
-                </a:solidFill>
-                <a:effectLst/>
-                <a:uFillTx/>
-                <a:latin typeface="Arial"/>
-                <a:ea typeface="Arial"/>
-              </a:rPr>
-              <a:t>a</a:t>
-            </a:r>
-            <a:endParaRPr lang="en-US" sz="1300" b="0" u="none" strike="noStrike">
-              <a:solidFill>
-                <a:srgbClr val="000000"/>
-              </a:solidFill>
-              <a:effectLst/>
-              <a:uFillTx/>
-              <a:latin typeface="Times New Roman"/>
-            </a:endParaRPr>
-          </a:p>
-        </p:txBody>
-      </p:sp>
-      <p:sp>
-        <p:nvSpPr>
-          <p:cNvPr id="86" name=""/>
-          <p:cNvSpPr txBox="1"/>
-          <p:nvPr/>
-        </p:nvSpPr>
-        <p:spPr>
-          <a:xfrm>
-            <a:off x="7993800" y="2580480"/>
-            <a:ext cx="154800" cy="79560"/>
-          </a:xfrm>
-          <a:prstGeom prst="rect">
-            <a:avLst/>
-          </a:prstGeom>
-          <a:noFill/>
-          <a:ln w="0">
-            <a:noFill/>
-          </a:ln>
-        </p:spPr>
-        <p:txBody>
-          <a:bodyPr wrap="none" lIns="0" tIns="0" rIns="0" bIns="0" anchor="t">
-            <a:spAutoFit/>
-          </a:bodyPr>
-          <a:p>
-            <a:pPr/>
-            <a:r>
-              <a:rPr lang="en-US" sz="620" b="0" u="none" strike="noStrike">
-                <a:solidFill>
-                  <a:srgbClr val="404040"/>
-                </a:solidFill>
-                <a:effectLst/>
-                <a:uFillTx/>
-                <a:latin typeface="Arial"/>
-                <a:ea typeface="Arial"/>
-              </a:rPr>
-              <a:t>0.92</a:t>
-            </a:r>
-            <a:endParaRPr lang="en-US" sz="620" b="0" u="none" strike="noStrike">
-              <a:solidFill>
-                <a:srgbClr val="000000"/>
-              </a:solidFill>
-              <a:effectLst/>
-              <a:uFillTx/>
-              <a:latin typeface="Times New Roman"/>
-            </a:endParaRPr>
-          </a:p>
-        </p:txBody>
-      </p:sp>
-      <p:sp>
-        <p:nvSpPr>
-          <p:cNvPr id="87" name=""/>
-          <p:cNvSpPr txBox="1"/>
-          <p:nvPr/>
-        </p:nvSpPr>
-        <p:spPr>
-          <a:xfrm>
-            <a:off x="8008560" y="2282040"/>
-            <a:ext cx="154800" cy="79560"/>
-          </a:xfrm>
-          <a:prstGeom prst="rect">
-            <a:avLst/>
-          </a:prstGeom>
-          <a:noFill/>
-          <a:ln w="0">
-            <a:noFill/>
-          </a:ln>
-        </p:spPr>
-        <p:txBody>
-          <a:bodyPr wrap="none" lIns="0" tIns="0" rIns="0" bIns="0" anchor="t">
-            <a:spAutoFit/>
-          </a:bodyPr>
-          <a:p>
-            <a:pPr/>
-            <a:r>
-              <a:rPr lang="en-US" sz="620" b="0" u="none" strike="noStrike">
-                <a:solidFill>
-                  <a:srgbClr val="404040"/>
-                </a:solidFill>
-                <a:effectLst/>
-                <a:uFillTx/>
-                <a:latin typeface="Arial"/>
-                <a:ea typeface="Arial"/>
-              </a:rPr>
-              <a:t>0.93</a:t>
-            </a:r>
-            <a:endParaRPr lang="en-US" sz="620" b="0" u="none" strike="noStrike">
-              <a:solidFill>
-                <a:srgbClr val="000000"/>
-              </a:solidFill>
-              <a:effectLst/>
-              <a:uFillTx/>
-              <a:latin typeface="Times New Roman"/>
-            </a:endParaRPr>
-          </a:p>
-        </p:txBody>
-      </p:sp>
-      <p:sp>
-        <p:nvSpPr>
-          <p:cNvPr id="88" name=""/>
-          <p:cNvSpPr txBox="1"/>
-          <p:nvPr/>
-        </p:nvSpPr>
-        <p:spPr>
-          <a:xfrm>
-            <a:off x="8403480" y="1087560"/>
-            <a:ext cx="154800" cy="79560"/>
-          </a:xfrm>
-          <a:prstGeom prst="rect">
-            <a:avLst/>
-          </a:prstGeom>
-          <a:noFill/>
-          <a:ln w="0">
-            <a:noFill/>
-          </a:ln>
-        </p:spPr>
-        <p:txBody>
-          <a:bodyPr wrap="none" lIns="0" tIns="0" rIns="0" bIns="0" anchor="t">
-            <a:spAutoFit/>
-          </a:bodyPr>
-          <a:p>
-            <a:pPr/>
-            <a:r>
-              <a:rPr lang="en-US" sz="620" b="0" u="none" strike="noStrike">
-                <a:solidFill>
-                  <a:srgbClr val="404040"/>
-                </a:solidFill>
-                <a:effectLst/>
-                <a:uFillTx/>
-                <a:latin typeface="Arial"/>
-                <a:ea typeface="Arial"/>
-              </a:rPr>
-              <a:t>1.27</a:t>
-            </a:r>
-            <a:endParaRPr lang="en-US" sz="620" b="0" u="none" strike="noStrike">
-              <a:solidFill>
-                <a:srgbClr val="000000"/>
-              </a:solidFill>
-              <a:effectLst/>
-              <a:uFillTx/>
-              <a:latin typeface="Times New Roman"/>
-            </a:endParaRPr>
-          </a:p>
-        </p:txBody>
-      </p:sp>
-      <p:sp>
-        <p:nvSpPr>
-          <p:cNvPr id="89" name=""/>
-          <p:cNvSpPr txBox="1"/>
-          <p:nvPr/>
-        </p:nvSpPr>
-        <p:spPr>
-          <a:xfrm>
-            <a:off x="8220600" y="1684800"/>
-            <a:ext cx="154800" cy="79560"/>
-          </a:xfrm>
-          <a:prstGeom prst="rect">
-            <a:avLst/>
-          </a:prstGeom>
-          <a:noFill/>
-          <a:ln w="0">
-            <a:noFill/>
-          </a:ln>
-        </p:spPr>
-        <p:txBody>
-          <a:bodyPr wrap="none" lIns="0" tIns="0" rIns="0" bIns="0" anchor="t">
-            <a:spAutoFit/>
-          </a:bodyPr>
-          <a:p>
-            <a:pPr/>
-            <a:r>
-              <a:rPr lang="en-US" sz="620" b="0" u="none" strike="noStrike">
-                <a:solidFill>
-                  <a:srgbClr val="404040"/>
-                </a:solidFill>
-                <a:effectLst/>
-                <a:uFillTx/>
-                <a:latin typeface="Arial"/>
-                <a:ea typeface="Arial"/>
-              </a:rPr>
-              <a:t>1.10</a:t>
-            </a:r>
-            <a:endParaRPr lang="en-US" sz="620" b="0" u="none" strike="noStrike">
-              <a:solidFill>
-                <a:srgbClr val="000000"/>
-              </a:solidFill>
-              <a:effectLst/>
-              <a:uFillTx/>
-              <a:latin typeface="Times New Roman"/>
-            </a:endParaRPr>
-          </a:p>
-        </p:txBody>
-      </p:sp>
-      <p:sp>
-        <p:nvSpPr>
-          <p:cNvPr id="90" name=""/>
-          <p:cNvSpPr txBox="1"/>
-          <p:nvPr/>
-        </p:nvSpPr>
-        <p:spPr>
-          <a:xfrm>
-            <a:off x="8306640" y="1386000"/>
-            <a:ext cx="154800" cy="79560"/>
-          </a:xfrm>
-          <a:prstGeom prst="rect">
-            <a:avLst/>
-          </a:prstGeom>
-          <a:noFill/>
-          <a:ln w="0">
-            <a:noFill/>
-          </a:ln>
-        </p:spPr>
-        <p:txBody>
-          <a:bodyPr wrap="none" lIns="0" tIns="0" rIns="0" bIns="0" anchor="t">
-            <a:spAutoFit/>
-          </a:bodyPr>
-          <a:p>
-            <a:pPr/>
-            <a:r>
-              <a:rPr lang="en-US" sz="620" b="0" u="none" strike="noStrike">
-                <a:solidFill>
-                  <a:srgbClr val="404040"/>
-                </a:solidFill>
-                <a:effectLst/>
-                <a:uFillTx/>
-                <a:latin typeface="Arial"/>
-                <a:ea typeface="Arial"/>
-              </a:rPr>
-              <a:t>1.17</a:t>
-            </a:r>
-            <a:endParaRPr lang="en-US" sz="620" b="0" u="none" strike="noStrike">
-              <a:solidFill>
-                <a:srgbClr val="000000"/>
-              </a:solidFill>
-              <a:effectLst/>
-              <a:uFillTx/>
-              <a:latin typeface="Times New Roman"/>
-            </a:endParaRPr>
-          </a:p>
-        </p:txBody>
-      </p:sp>
-      <p:sp>
-        <p:nvSpPr>
-          <p:cNvPr id="91" name=""/>
-          <p:cNvSpPr/>
-          <p:nvPr/>
-        </p:nvSpPr>
-        <p:spPr>
-          <a:xfrm>
-            <a:off x="8959680" y="1031760"/>
-            <a:ext cx="1842480" cy="1851840"/>
-          </a:xfrm>
-          <a:custGeom>
-            <a:avLst/>
-            <a:gdLst/>
-            <a:ahLst/>
-            <a:rect l="0" t="0" r="r" b="b"/>
-            <a:pathLst>
-              <a:path w="5118" h="5144">
-                <a:moveTo>
-                  <a:pt x="0" y="0"/>
-                </a:moveTo>
-                <a:lnTo>
-                  <a:pt x="5118" y="0"/>
-                </a:lnTo>
-                <a:lnTo>
-                  <a:pt x="5118" y="5144"/>
-                </a:lnTo>
-                <a:lnTo>
-                  <a:pt x="0" y="5144"/>
-                </a:lnTo>
-                <a:lnTo>
-                  <a:pt x="0" y="0"/>
-                </a:lnTo>
-                <a:close/>
-              </a:path>
-            </a:pathLst>
-          </a:custGeom>
-          <a:solidFill>
-            <a:srgbClr val="FFFFFF"/>
-          </a:solidFill>
-          <a:ln w="0">
-            <a:noFill/>
-          </a:ln>
-        </p:spPr>
-        <p:txBody>
-          <a:bodyPr lIns="0" tIns="0" rIns="0" bIns="0" anchor="t">
-            <a:noAutofit/>
-          </a:bodyPr>
-          <a:p>
-            <a:endParaRPr lang="en-US" sz="2400" b="0" u="none" strike="noStrike">
-              <a:solidFill>
-                <a:srgbClr val="000000"/>
-              </a:solidFill>
-              <a:effectLst/>
-              <a:uFillTx/>
-              <a:latin typeface="Times New Roman"/>
-            </a:endParaRPr>
-          </a:p>
-        </p:txBody>
-      </p:sp>
-      <p:sp>
-        <p:nvSpPr>
-          <p:cNvPr id="92" name=""/>
-          <p:cNvSpPr/>
-          <p:nvPr/>
-        </p:nvSpPr>
-        <p:spPr>
-          <a:xfrm flipV="1">
-            <a:off x="10080000" y="1031760"/>
-            <a:ext cx="0" cy="1851480"/>
-          </a:xfrm>
-          <a:prstGeom prst="line">
-            <a:avLst/>
-          </a:prstGeom>
-          <a:ln w="9360">
-            <a:solidFill>
-              <a:srgbClr val="8C8C8C"/>
-            </a:solidFill>
-            <a:custDash>
-              <a:ds d="403846" sp="403846"/>
-            </a:custDash>
-            <a:round/>
-          </a:ln>
-        </p:spPr>
-        <p:style>
-          <a:lnRef idx="0"/>
-          <a:fillRef idx="0"/>
-          <a:effectRef idx="0"/>
-          <a:fontRef idx="minor"/>
-        </p:style>
-        <p:txBody>
-          <a:bodyPr lIns="4680" tIns="4680" rIns="4680" bIns="4680" anchor="t">
-            <a:noAutofit/>
-          </a:bodyPr>
-          <a:p>
-            <a:endParaRPr lang="en-US" sz="2400" b="0" u="none" strike="noStrike">
-              <a:solidFill>
-                <a:srgbClr val="000000"/>
-              </a:solidFill>
-              <a:effectLst/>
-              <a:uFillTx/>
-              <a:latin typeface="Times New Roman"/>
-            </a:endParaRPr>
-          </a:p>
-        </p:txBody>
-      </p:sp>
-      <p:sp>
-        <p:nvSpPr>
-          <p:cNvPr id="93" name=""/>
-          <p:cNvSpPr/>
-          <p:nvPr/>
-        </p:nvSpPr>
-        <p:spPr>
-          <a:xfrm>
-            <a:off x="9252360" y="2703960"/>
-            <a:ext cx="780840" cy="0"/>
-          </a:xfrm>
-          <a:prstGeom prst="line">
-            <a:avLst/>
-          </a:prstGeom>
-          <a:ln w="14760">
-            <a:solidFill>
-              <a:srgbClr val="D55E00"/>
-            </a:solidFill>
-            <a:round/>
-          </a:ln>
-        </p:spPr>
-        <p:style>
-          <a:lnRef idx="0"/>
-          <a:fillRef idx="0"/>
-          <a:effectRef idx="0"/>
-          <a:fontRef idx="minor"/>
-        </p:style>
-        <p:txBody>
-          <a:bodyPr lIns="7200" tIns="-7200" rIns="7200" bIns="-7200" anchor="t">
-            <a:noAutofit/>
-          </a:bodyPr>
-          <a:p>
-            <a:endParaRPr lang="en-US" sz="2400" b="0" u="none" strike="noStrike">
-              <a:solidFill>
-                <a:srgbClr val="000000"/>
-              </a:solidFill>
-              <a:effectLst/>
-              <a:uFillTx/>
-              <a:latin typeface="Times New Roman"/>
-            </a:endParaRPr>
-          </a:p>
-        </p:txBody>
-      </p:sp>
-      <p:sp>
-        <p:nvSpPr>
-          <p:cNvPr id="94" name=""/>
-          <p:cNvSpPr/>
-          <p:nvPr/>
-        </p:nvSpPr>
-        <p:spPr>
-          <a:xfrm>
-            <a:off x="9562320" y="1211040"/>
-            <a:ext cx="745560" cy="0"/>
-          </a:xfrm>
-          <a:prstGeom prst="line">
-            <a:avLst/>
-          </a:prstGeom>
-          <a:ln w="14760">
-            <a:solidFill>
-              <a:srgbClr val="999999"/>
-            </a:solidFill>
-            <a:round/>
-          </a:ln>
-        </p:spPr>
-        <p:style>
-          <a:lnRef idx="0"/>
-          <a:fillRef idx="0"/>
-          <a:effectRef idx="0"/>
-          <a:fontRef idx="minor"/>
-        </p:style>
-        <p:txBody>
-          <a:bodyPr lIns="7200" tIns="-7200" rIns="7200" bIns="-7200" anchor="t">
-            <a:noAutofit/>
-          </a:bodyPr>
-          <a:p>
-            <a:endParaRPr lang="en-US" sz="2400" b="0" u="none" strike="noStrike">
-              <a:solidFill>
-                <a:srgbClr val="000000"/>
-              </a:solidFill>
-              <a:effectLst/>
-              <a:uFillTx/>
-              <a:latin typeface="Times New Roman"/>
-            </a:endParaRPr>
-          </a:p>
-        </p:txBody>
-      </p:sp>
-      <p:sp>
-        <p:nvSpPr>
-          <p:cNvPr id="95" name=""/>
-          <p:cNvSpPr/>
-          <p:nvPr/>
-        </p:nvSpPr>
-        <p:spPr>
-          <a:xfrm>
-            <a:off x="9043200" y="1808280"/>
-            <a:ext cx="818640" cy="0"/>
-          </a:xfrm>
-          <a:prstGeom prst="line">
-            <a:avLst/>
-          </a:prstGeom>
-          <a:ln w="14760">
-            <a:solidFill>
-              <a:srgbClr val="D55E00"/>
-            </a:solidFill>
-            <a:round/>
-          </a:ln>
-        </p:spPr>
-        <p:style>
-          <a:lnRef idx="0"/>
-          <a:fillRef idx="0"/>
-          <a:effectRef idx="0"/>
-          <a:fontRef idx="minor"/>
-        </p:style>
-        <p:txBody>
-          <a:bodyPr lIns="7200" tIns="-7200" rIns="7200" bIns="-7200" anchor="t">
-            <a:noAutofit/>
-          </a:bodyPr>
-          <a:p>
-            <a:endParaRPr lang="en-US" sz="2400" b="0" u="none" strike="noStrike">
-              <a:solidFill>
-                <a:srgbClr val="000000"/>
-              </a:solidFill>
-              <a:effectLst/>
-              <a:uFillTx/>
-              <a:latin typeface="Times New Roman"/>
-            </a:endParaRPr>
-          </a:p>
-        </p:txBody>
-      </p:sp>
-      <p:sp>
-        <p:nvSpPr>
-          <p:cNvPr id="96" name=""/>
-          <p:cNvSpPr/>
-          <p:nvPr/>
-        </p:nvSpPr>
-        <p:spPr>
-          <a:xfrm>
-            <a:off x="9910800" y="1509480"/>
-            <a:ext cx="807120" cy="0"/>
-          </a:xfrm>
-          <a:prstGeom prst="line">
-            <a:avLst/>
-          </a:prstGeom>
-          <a:ln w="14760">
-            <a:solidFill>
-              <a:srgbClr val="999999"/>
-            </a:solidFill>
-            <a:round/>
-          </a:ln>
-        </p:spPr>
-        <p:style>
-          <a:lnRef idx="0"/>
-          <a:fillRef idx="0"/>
-          <a:effectRef idx="0"/>
-          <a:fontRef idx="minor"/>
-        </p:style>
-        <p:txBody>
-          <a:bodyPr lIns="7200" tIns="-7200" rIns="7200" bIns="-7200" anchor="t">
-            <a:noAutofit/>
-          </a:bodyPr>
-          <a:p>
-            <a:endParaRPr lang="en-US" sz="2400" b="0" u="none" strike="noStrike">
-              <a:solidFill>
-                <a:srgbClr val="000000"/>
-              </a:solidFill>
-              <a:effectLst/>
-              <a:uFillTx/>
-              <a:latin typeface="Times New Roman"/>
-            </a:endParaRPr>
-          </a:p>
-        </p:txBody>
-      </p:sp>
-      <p:sp>
-        <p:nvSpPr>
-          <p:cNvPr id="97" name=""/>
-          <p:cNvSpPr/>
-          <p:nvPr/>
-        </p:nvSpPr>
-        <p:spPr>
-          <a:xfrm>
-            <a:off x="9804240" y="2106720"/>
-            <a:ext cx="630360" cy="0"/>
-          </a:xfrm>
-          <a:prstGeom prst="line">
-            <a:avLst/>
-          </a:prstGeom>
-          <a:ln w="14760">
-            <a:solidFill>
-              <a:srgbClr val="999999"/>
-            </a:solidFill>
-            <a:round/>
-          </a:ln>
-        </p:spPr>
-        <p:style>
-          <a:lnRef idx="0"/>
-          <a:fillRef idx="0"/>
-          <a:effectRef idx="0"/>
-          <a:fontRef idx="minor"/>
-        </p:style>
-        <p:txBody>
-          <a:bodyPr lIns="7200" tIns="-7200" rIns="7200" bIns="-7200" anchor="t">
-            <a:noAutofit/>
-          </a:bodyPr>
-          <a:p>
-            <a:endParaRPr lang="en-US" sz="2400" b="0" u="none" strike="noStrike">
-              <a:solidFill>
-                <a:srgbClr val="000000"/>
-              </a:solidFill>
-              <a:effectLst/>
-              <a:uFillTx/>
-              <a:latin typeface="Times New Roman"/>
-            </a:endParaRPr>
-          </a:p>
-        </p:txBody>
-      </p:sp>
-      <p:sp>
-        <p:nvSpPr>
-          <p:cNvPr id="98" name=""/>
-          <p:cNvSpPr/>
-          <p:nvPr/>
-        </p:nvSpPr>
-        <p:spPr>
-          <a:xfrm>
-            <a:off x="9611280" y="2673000"/>
-            <a:ext cx="63000" cy="62640"/>
-          </a:xfrm>
-          <a:custGeom>
-            <a:avLst/>
-            <a:gdLst/>
-            <a:ahLst/>
-            <a:rect l="0" t="0" r="r" b="b"/>
-            <a:pathLst>
-              <a:path w="175" h="174">
-                <a:moveTo>
-                  <a:pt x="0" y="86"/>
-                </a:moveTo>
-                <a:cubicBezTo>
-                  <a:pt x="0" y="-29"/>
-                  <a:pt x="175" y="-29"/>
-                  <a:pt x="175" y="86"/>
-                </a:cubicBezTo>
-                <a:cubicBezTo>
-                  <a:pt x="175" y="203"/>
-                  <a:pt x="0" y="203"/>
-                  <a:pt x="0" y="86"/>
-                </a:cubicBezTo>
-                <a:close/>
-              </a:path>
-            </a:pathLst>
-          </a:custGeom>
-          <a:solidFill>
-            <a:srgbClr val="D55E00"/>
-          </a:solidFill>
-          <a:ln w="0">
-            <a:noFill/>
-          </a:ln>
-        </p:spPr>
-        <p:txBody>
-          <a:bodyPr lIns="0" tIns="0" rIns="0" bIns="0" anchor="t">
-            <a:noAutofit/>
-          </a:bodyPr>
-          <a:p>
-            <a:endParaRPr lang="en-US" sz="2400" b="0" u="none" strike="noStrike">
-              <a:solidFill>
-                <a:srgbClr val="FFFFFF"/>
-              </a:solidFill>
-              <a:effectLst/>
-              <a:uFillTx/>
-              <a:latin typeface="Times New Roman"/>
-            </a:endParaRPr>
-          </a:p>
-        </p:txBody>
-      </p:sp>
-      <p:sp>
-        <p:nvSpPr>
-          <p:cNvPr id="99" name=""/>
-          <p:cNvSpPr/>
-          <p:nvPr/>
-        </p:nvSpPr>
-        <p:spPr>
-          <a:xfrm>
-            <a:off x="9611280" y="2673000"/>
-            <a:ext cx="63000" cy="62640"/>
-          </a:xfrm>
-          <a:custGeom>
-            <a:avLst/>
-            <a:gdLst/>
-            <a:ahLst/>
-            <a:rect l="0" t="0" r="r" b="b"/>
-            <a:pathLst>
-              <a:path fill="none" w="175" h="174">
-                <a:moveTo>
-                  <a:pt x="175" y="86"/>
-                </a:moveTo>
-                <a:cubicBezTo>
-                  <a:pt x="175" y="203"/>
-                  <a:pt x="0" y="203"/>
-                  <a:pt x="0" y="86"/>
-                </a:cubicBezTo>
-                <a:cubicBezTo>
-                  <a:pt x="0" y="-29"/>
-                  <a:pt x="175" y="-29"/>
-                  <a:pt x="175" y="86"/>
-                </a:cubicBezTo>
-              </a:path>
-            </a:pathLst>
-          </a:custGeom>
-          <a:ln cap="rnd" w="7920">
-            <a:solidFill>
-              <a:srgbClr val="D55E00"/>
-            </a:solidFill>
-            <a:round/>
-          </a:ln>
-        </p:spPr>
-        <p:txBody>
-          <a:bodyPr lIns="3960" tIns="3960" rIns="3960" bIns="3960" anchor="t">
-            <a:noAutofit/>
-          </a:bodyPr>
-          <a:p>
-            <a:endParaRPr lang="en-US" sz="2400" b="0" u="none" strike="noStrike">
-              <a:solidFill>
-                <a:srgbClr val="000000"/>
-              </a:solidFill>
-              <a:effectLst/>
-              <a:uFillTx/>
-              <a:latin typeface="Times New Roman"/>
-            </a:endParaRPr>
-          </a:p>
-        </p:txBody>
-      </p:sp>
-      <p:sp>
-        <p:nvSpPr>
-          <p:cNvPr id="100" name=""/>
-          <p:cNvSpPr/>
-          <p:nvPr/>
-        </p:nvSpPr>
-        <p:spPr>
-          <a:xfrm>
-            <a:off x="9903960" y="1179720"/>
-            <a:ext cx="62640" cy="62640"/>
-          </a:xfrm>
-          <a:custGeom>
-            <a:avLst/>
-            <a:gdLst/>
-            <a:ahLst/>
-            <a:rect l="0" t="0" r="r" b="b"/>
-            <a:pathLst>
-              <a:path w="174" h="174">
-                <a:moveTo>
-                  <a:pt x="0" y="87"/>
-                </a:moveTo>
-                <a:cubicBezTo>
-                  <a:pt x="0" y="-29"/>
-                  <a:pt x="174" y="-29"/>
-                  <a:pt x="174" y="87"/>
-                </a:cubicBezTo>
-                <a:cubicBezTo>
-                  <a:pt x="174" y="203"/>
-                  <a:pt x="0" y="203"/>
-                  <a:pt x="0" y="87"/>
-                </a:cubicBezTo>
-                <a:close/>
-              </a:path>
-            </a:pathLst>
-          </a:custGeom>
-          <a:solidFill>
-            <a:srgbClr val="999999"/>
-          </a:solidFill>
-          <a:ln w="0">
-            <a:noFill/>
-          </a:ln>
-        </p:spPr>
-        <p:txBody>
-          <a:bodyPr lIns="0" tIns="0" rIns="0" bIns="0" anchor="t">
-            <a:noAutofit/>
-          </a:bodyPr>
-          <a:p>
-            <a:endParaRPr lang="en-US" sz="2400" b="0" u="none" strike="noStrike">
-              <a:solidFill>
-                <a:srgbClr val="FFFFFF"/>
-              </a:solidFill>
-              <a:effectLst/>
-              <a:uFillTx/>
-              <a:latin typeface="Times New Roman"/>
-            </a:endParaRPr>
-          </a:p>
-        </p:txBody>
-      </p:sp>
-      <p:sp>
-        <p:nvSpPr>
-          <p:cNvPr id="101" name=""/>
-          <p:cNvSpPr/>
-          <p:nvPr/>
-        </p:nvSpPr>
-        <p:spPr>
-          <a:xfrm>
-            <a:off x="9903960" y="1179720"/>
-            <a:ext cx="62640" cy="62640"/>
-          </a:xfrm>
-          <a:custGeom>
-            <a:avLst/>
-            <a:gdLst/>
-            <a:ahLst/>
-            <a:rect l="0" t="0" r="r" b="b"/>
-            <a:pathLst>
-              <a:path fill="none" w="174" h="174">
-                <a:moveTo>
-                  <a:pt x="174" y="87"/>
-                </a:moveTo>
-                <a:cubicBezTo>
-                  <a:pt x="174" y="203"/>
-                  <a:pt x="0" y="203"/>
-                  <a:pt x="0" y="87"/>
-                </a:cubicBezTo>
-                <a:cubicBezTo>
-                  <a:pt x="0" y="-29"/>
-                  <a:pt x="174" y="-29"/>
-                  <a:pt x="174" y="87"/>
-                </a:cubicBezTo>
-              </a:path>
-            </a:pathLst>
-          </a:custGeom>
-          <a:ln cap="rnd" w="7920">
-            <a:solidFill>
-              <a:srgbClr val="999999"/>
-            </a:solidFill>
-            <a:round/>
-          </a:ln>
-        </p:spPr>
-        <p:txBody>
-          <a:bodyPr lIns="3960" tIns="3960" rIns="3960" bIns="3960" anchor="t">
-            <a:noAutofit/>
-          </a:bodyPr>
-          <a:p>
-            <a:endParaRPr lang="en-US" sz="2400" b="0" u="none" strike="noStrike">
-              <a:solidFill>
-                <a:srgbClr val="000000"/>
-              </a:solidFill>
-              <a:effectLst/>
-              <a:uFillTx/>
-              <a:latin typeface="Times New Roman"/>
-            </a:endParaRPr>
-          </a:p>
-        </p:txBody>
-      </p:sp>
-      <p:sp>
-        <p:nvSpPr>
           <p:cNvPr id="102" name=""/>
           <p:cNvSpPr/>
           <p:nvPr/>
         </p:nvSpPr>
         <p:spPr>
           <a:xfrm>
-            <a:off x="9421560" y="1776960"/>
+            <a:off x="9416520" y="1776960"/>
             <a:ext cx="62640" cy="63000"/>
           </a:xfrm>
           <a:custGeom>
@@ -5079,7 +5079,7 @@
         </p:nvSpPr>
         <p:spPr>
           <a:xfrm>
-            <a:off x="9421560" y="1776960"/>
+            <a:off x="9416520" y="1776960"/>
             <a:ext cx="62640" cy="63000"/>
           </a:xfrm>
           <a:custGeom>
@@ -5136,8 +5136,8 @@
         </p:nvSpPr>
         <p:spPr>
           <a:xfrm>
-            <a:off x="10283040" y="1478520"/>
-            <a:ext cx="63000" cy="62640"/>
+            <a:off x="10288440" y="1478520"/>
+            <a:ext cx="62640" cy="62640"/>
           </a:xfrm>
           <a:custGeom>
             <a:avLst/>
@@ -5145,17 +5145,17 @@
             <a:ahLst/>
             <a:rect l="0" t="0" r="r" b="b"/>
             <a:pathLst>
-              <a:path w="175" h="174">
+              <a:path w="174" h="174">
                 <a:moveTo>
                   <a:pt x="0" y="86"/>
                 </a:moveTo>
                 <a:cubicBezTo>
                   <a:pt x="0" y="-29"/>
-                  <a:pt x="175" y="-29"/>
-                  <a:pt x="175" y="86"/>
+                  <a:pt x="174" y="-29"/>
+                  <a:pt x="174" y="86"/>
                 </a:cubicBezTo>
                 <a:cubicBezTo>
-                  <a:pt x="175" y="203"/>
+                  <a:pt x="174" y="203"/>
                   <a:pt x="0" y="203"/>
                   <a:pt x="0" y="86"/>
                 </a:cubicBezTo>
@@ -5194,8 +5194,8 @@
         </p:nvSpPr>
         <p:spPr>
           <a:xfrm>
-            <a:off x="10283040" y="1478520"/>
-            <a:ext cx="63000" cy="62640"/>
+            <a:off x="10288440" y="1478520"/>
+            <a:ext cx="62640" cy="62640"/>
           </a:xfrm>
           <a:custGeom>
             <a:avLst/>
@@ -5203,19 +5203,19 @@
             <a:ahLst/>
             <a:rect l="0" t="0" r="r" b="b"/>
             <a:pathLst>
-              <a:path fill="none" w="175" h="174">
+              <a:path fill="none" w="174" h="174">
                 <a:moveTo>
-                  <a:pt x="175" y="86"/>
+                  <a:pt x="174" y="86"/>
                 </a:moveTo>
                 <a:cubicBezTo>
-                  <a:pt x="175" y="203"/>
+                  <a:pt x="174" y="203"/>
                   <a:pt x="0" y="203"/>
                   <a:pt x="0" y="86"/>
                 </a:cubicBezTo>
                 <a:cubicBezTo>
                   <a:pt x="0" y="-29"/>
-                  <a:pt x="175" y="-29"/>
-                  <a:pt x="175" y="86"/>
+                  <a:pt x="174" y="-29"/>
+                  <a:pt x="174" y="86"/>
                 </a:cubicBezTo>
               </a:path>
             </a:pathLst>
@@ -5251,8 +5251,8 @@
         </p:nvSpPr>
         <p:spPr>
           <a:xfrm>
-            <a:off x="10088280" y="2075760"/>
-            <a:ext cx="62640" cy="62640"/>
+            <a:off x="10077120" y="2075760"/>
+            <a:ext cx="63000" cy="62640"/>
           </a:xfrm>
           <a:custGeom>
             <a:avLst/>
@@ -5260,17 +5260,17 @@
             <a:ahLst/>
             <a:rect l="0" t="0" r="r" b="b"/>
             <a:pathLst>
-              <a:path w="174" h="174">
+              <a:path w="175" h="174">
                 <a:moveTo>
                   <a:pt x="0" y="87"/>
                 </a:moveTo>
                 <a:cubicBezTo>
                   <a:pt x="0" y="-29"/>
-                  <a:pt x="174" y="-29"/>
-                  <a:pt x="174" y="87"/>
+                  <a:pt x="175" y="-29"/>
+                  <a:pt x="175" y="87"/>
                 </a:cubicBezTo>
                 <a:cubicBezTo>
-                  <a:pt x="174" y="203"/>
+                  <a:pt x="175" y="203"/>
                   <a:pt x="0" y="203"/>
                   <a:pt x="0" y="87"/>
                 </a:cubicBezTo>
@@ -5309,8 +5309,8 @@
         </p:nvSpPr>
         <p:spPr>
           <a:xfrm>
-            <a:off x="10088280" y="2075760"/>
-            <a:ext cx="62640" cy="62640"/>
+            <a:off x="10077120" y="2075760"/>
+            <a:ext cx="63000" cy="62640"/>
           </a:xfrm>
           <a:custGeom>
             <a:avLst/>
@@ -5318,19 +5318,19 @@
             <a:ahLst/>
             <a:rect l="0" t="0" r="r" b="b"/>
             <a:pathLst>
-              <a:path fill="none" w="174" h="174">
+              <a:path fill="none" w="175" h="174">
                 <a:moveTo>
-                  <a:pt x="174" y="87"/>
+                  <a:pt x="175" y="87"/>
                 </a:moveTo>
                 <a:cubicBezTo>
-                  <a:pt x="174" y="203"/>
+                  <a:pt x="175" y="203"/>
                   <a:pt x="0" y="203"/>
                   <a:pt x="0" y="87"/>
                 </a:cubicBezTo>
                 <a:cubicBezTo>
                   <a:pt x="0" y="-29"/>
-                  <a:pt x="174" y="-29"/>
-                  <a:pt x="174" y="87"/>
+                  <a:pt x="175" y="-29"/>
+                  <a:pt x="175" y="87"/>
                 </a:cubicBezTo>
               </a:path>
             </a:pathLst>
@@ -5366,7 +5366,7 @@
         </p:nvSpPr>
         <p:spPr>
           <a:xfrm>
-            <a:off x="8094960" y="1983240"/>
+            <a:off x="8083800" y="1983240"/>
             <a:ext cx="154800" cy="79560"/>
           </a:xfrm>
           <a:prstGeom prst="rect">
@@ -5414,7 +5414,7 @@
         </p:nvSpPr>
         <p:spPr>
           <a:xfrm>
-            <a:off x="9573120" y="2580480"/>
+            <a:off x="9551880" y="2282040"/>
             <a:ext cx="154800" cy="79560"/>
           </a:xfrm>
           <a:prstGeom prst="rect">
@@ -5441,7 +5441,7 @@
                 <a:latin typeface="Arial"/>
                 <a:ea typeface="Arial"/>
               </a:rPr>
-              <a:t>0.71</a:t>
+              <a:t>0.70</a:t>
             </a:r>
             <a:endParaRPr lang="en-US" sz="620" b="0" u="none" strike="noStrike">
               <a:solidFill>
@@ -5462,7 +5462,7 @@
         </p:nvSpPr>
         <p:spPr>
           <a:xfrm>
-            <a:off x="9865440" y="1087560"/>
+            <a:off x="9831600" y="1087560"/>
             <a:ext cx="154800" cy="79560"/>
           </a:xfrm>
           <a:prstGeom prst="rect">
@@ -5489,7 +5489,7 @@
                 <a:latin typeface="Arial"/>
                 <a:ea typeface="Arial"/>
               </a:rPr>
-              <a:t>0.89</a:t>
+              <a:t>0.88</a:t>
             </a:r>
             <a:endParaRPr lang="en-US" sz="620" b="0" u="none" strike="noStrike">
               <a:solidFill>
@@ -5510,7 +5510,7 @@
         </p:nvSpPr>
         <p:spPr>
           <a:xfrm>
-            <a:off x="9383040" y="1684800"/>
+            <a:off x="9378000" y="1684800"/>
             <a:ext cx="154800" cy="79560"/>
           </a:xfrm>
           <a:prstGeom prst="rect">
@@ -5558,7 +5558,7 @@
         </p:nvSpPr>
         <p:spPr>
           <a:xfrm>
-            <a:off x="10244880" y="1386000"/>
+            <a:off x="10249920" y="1386000"/>
             <a:ext cx="154800" cy="79560"/>
           </a:xfrm>
           <a:prstGeom prst="rect">
@@ -5585,7 +5585,7 @@
                 <a:latin typeface="Arial"/>
                 <a:ea typeface="Arial"/>
               </a:rPr>
-              <a:t>1.20</a:t>
+              <a:t>1.22</a:t>
             </a:r>
             <a:endParaRPr lang="en-US" sz="620" b="0" u="none" strike="noStrike">
               <a:solidFill>
@@ -5606,7 +5606,7 @@
         </p:nvSpPr>
         <p:spPr>
           <a:xfrm>
-            <a:off x="10049760" y="1983240"/>
+            <a:off x="10038600" y="1983240"/>
             <a:ext cx="154800" cy="79560"/>
           </a:xfrm>
           <a:prstGeom prst="rect">
@@ -5745,7 +5745,7 @@
         </p:nvSpPr>
         <p:spPr>
           <a:xfrm flipV="1">
-            <a:off x="7299000" y="2883240"/>
+            <a:off x="7292880" y="2883240"/>
             <a:ext cx="0" cy="31680"/>
           </a:xfrm>
           <a:prstGeom prst="line">
@@ -5788,7 +5788,7 @@
         </p:nvSpPr>
         <p:spPr>
           <a:xfrm flipV="1">
-            <a:off x="7723800" y="2883240"/>
+            <a:off x="7715520" y="2883240"/>
             <a:ext cx="0" cy="31680"/>
           </a:xfrm>
           <a:prstGeom prst="line">
@@ -5831,7 +5831,7 @@
         </p:nvSpPr>
         <p:spPr>
           <a:xfrm flipV="1">
-            <a:off x="8174520" y="2883240"/>
+            <a:off x="8163000" y="2883240"/>
             <a:ext cx="0" cy="31680"/>
           </a:xfrm>
           <a:prstGeom prst="line">
@@ -5922,7 +5922,7 @@
         </p:nvSpPr>
         <p:spPr>
           <a:xfrm>
-            <a:off x="7235640" y="2927520"/>
+            <a:off x="7229520" y="2927520"/>
             <a:ext cx="142560" cy="102600"/>
           </a:xfrm>
           <a:prstGeom prst="rect">
@@ -5970,7 +5970,7 @@
         </p:nvSpPr>
         <p:spPr>
           <a:xfrm>
-            <a:off x="7660440" y="2927520"/>
+            <a:off x="7652160" y="2927520"/>
             <a:ext cx="142560" cy="102600"/>
           </a:xfrm>
           <a:prstGeom prst="rect">
@@ -6061,7 +6061,7 @@
         </p:nvSpPr>
         <p:spPr>
           <a:xfrm flipV="1">
-            <a:off x="9204480" y="2883240"/>
+            <a:off x="9198360" y="2883240"/>
             <a:ext cx="0" cy="31680"/>
           </a:xfrm>
           <a:prstGeom prst="line">
@@ -6104,7 +6104,7 @@
         </p:nvSpPr>
         <p:spPr>
           <a:xfrm flipV="1">
-            <a:off x="9629280" y="2883240"/>
+            <a:off x="9621000" y="2883240"/>
             <a:ext cx="0" cy="31680"/>
           </a:xfrm>
           <a:prstGeom prst="line">
@@ -6147,7 +6147,7 @@
         </p:nvSpPr>
         <p:spPr>
           <a:xfrm flipV="1">
-            <a:off x="10080000" y="2883240"/>
+            <a:off x="10068480" y="2883240"/>
             <a:ext cx="0" cy="31680"/>
           </a:xfrm>
           <a:prstGeom prst="line">
@@ -6190,7 +6190,7 @@
         </p:nvSpPr>
         <p:spPr>
           <a:xfrm>
-            <a:off x="8111160" y="2927520"/>
+            <a:off x="8099640" y="2927520"/>
             <a:ext cx="142560" cy="102600"/>
           </a:xfrm>
           <a:prstGeom prst="rect">
@@ -6238,7 +6238,7 @@
         </p:nvSpPr>
         <p:spPr>
           <a:xfrm>
-            <a:off x="9141120" y="2927520"/>
+            <a:off x="9135000" y="2927520"/>
             <a:ext cx="142560" cy="102600"/>
           </a:xfrm>
           <a:prstGeom prst="rect">
@@ -6286,7 +6286,7 @@
         </p:nvSpPr>
         <p:spPr>
           <a:xfrm>
-            <a:off x="9565920" y="2927520"/>
+            <a:off x="9557640" y="2927520"/>
             <a:ext cx="142560" cy="102600"/>
           </a:xfrm>
           <a:prstGeom prst="rect">
@@ -6377,7 +6377,7 @@
         </p:nvSpPr>
         <p:spPr>
           <a:xfrm>
-            <a:off x="10016640" y="2927520"/>
+            <a:off x="10005120" y="2927520"/>
             <a:ext cx="142560" cy="102600"/>
           </a:xfrm>
           <a:prstGeom prst="rect">
@@ -6425,7 +6425,55 @@
         </p:nvSpPr>
         <p:spPr>
           <a:xfrm>
-            <a:off x="5663880" y="2653560"/>
+            <a:off x="5587560" y="2653560"/>
+            <a:ext cx="1499040" cy="102600"/>
+          </a:xfrm>
+          <a:prstGeom prst="rect">
+            <a:avLst/>
+          </a:prstGeom>
+          <a:noFill/>
+          <a:ln w="0">
+            <a:noFill/>
+          </a:ln>
+        </p:spPr>
+        <p:txBody>
+          <a:bodyPr wrap="none" lIns="0" tIns="0" rIns="0" bIns="0" anchor="t">
+            <a:spAutoFit/>
+          </a:bodyPr>
+          <a:p>
+            <a:pPr/>
+            <a:r>
+              <a:rPr lang="en-US" sz="800" b="0" u="none" strike="noStrike">
+                <a:solidFill>
+                  <a:srgbClr val="262626"/>
+                </a:solidFill>
+                <a:effectLst/>
+                <a:uFillTx/>
+                <a:latin typeface="Arial"/>
+                <a:ea typeface="Arial"/>
+              </a:rPr>
+              <a:t>Recent survey effort (2009-2024)</a:t>
+            </a:r>
+            <a:endParaRPr lang="en-US" sz="800" b="0" u="none" strike="noStrike">
+              <a:solidFill>
+                <a:srgbClr val="000000"/>
+              </a:solidFill>
+              <a:effectLst/>
+              <a:uFillTx/>
+              <a:latin typeface="Times New Roman"/>
+            </a:endParaRPr>
+          </a:p>
+        </p:txBody>
+      </p:sp>
+      <p:sp>
+        <p:nvSpPr>
+          <p:cNvPr id="132" name=""/>
+          <p:cNvSpPr txBox="1"/>
+          <p:nvPr/>
+        </p:nvSpPr>
+        <p:spPr>
+          <a:xfrm>
+            <a:off x="5663880" y="2354760"/>
             <a:ext cx="1408320" cy="102600"/>
           </a:xfrm>
           <a:prstGeom prst="rect">
@@ -6453,54 +6501,6 @@
                 <a:ea typeface="Arial"/>
               </a:rPr>
               <a:t>Early survey effort (2002-2008)</a:t>
-            </a:r>
-            <a:endParaRPr lang="en-US" sz="800" b="0" u="none" strike="noStrike">
-              <a:solidFill>
-                <a:srgbClr val="000000"/>
-              </a:solidFill>
-              <a:effectLst/>
-              <a:uFillTx/>
-              <a:latin typeface="Times New Roman"/>
-            </a:endParaRPr>
-          </a:p>
-        </p:txBody>
-      </p:sp>
-      <p:sp>
-        <p:nvSpPr>
-          <p:cNvPr id="132" name=""/>
-          <p:cNvSpPr txBox="1"/>
-          <p:nvPr/>
-        </p:nvSpPr>
-        <p:spPr>
-          <a:xfrm>
-            <a:off x="5587560" y="2354760"/>
-            <a:ext cx="1499040" cy="102600"/>
-          </a:xfrm>
-          <a:prstGeom prst="rect">
-            <a:avLst/>
-          </a:prstGeom>
-          <a:noFill/>
-          <a:ln w="0">
-            <a:noFill/>
-          </a:ln>
-        </p:spPr>
-        <p:txBody>
-          <a:bodyPr wrap="none" lIns="0" tIns="0" rIns="0" bIns="0" anchor="t">
-            <a:spAutoFit/>
-          </a:bodyPr>
-          <a:p>
-            <a:pPr/>
-            <a:r>
-              <a:rPr lang="en-US" sz="800" b="0" u="none" strike="noStrike">
-                <a:solidFill>
-                  <a:srgbClr val="262626"/>
-                </a:solidFill>
-                <a:effectLst/>
-                <a:uFillTx/>
-                <a:latin typeface="Arial"/>
-                <a:ea typeface="Arial"/>
-              </a:rPr>
-              <a:t>Recent survey effort (2009-2024)</a:t>
             </a:r>
             <a:endParaRPr lang="en-US" sz="800" b="0" u="none" strike="noStrike">
               <a:solidFill>
@@ -7989,7 +7989,7 @@
         </p:nvSpPr>
         <p:spPr>
           <a:xfrm flipV="1">
-            <a:off x="2028240" y="4713480"/>
+            <a:off x="2060280" y="4713480"/>
             <a:ext cx="0" cy="1758960"/>
           </a:xfrm>
           <a:prstGeom prst="line">
@@ -8032,7 +8032,7 @@
         </p:nvSpPr>
         <p:spPr>
           <a:xfrm flipV="1">
-            <a:off x="3175920" y="4713480"/>
+            <a:off x="3196800" y="4713480"/>
             <a:ext cx="0" cy="1758960"/>
           </a:xfrm>
           <a:prstGeom prst="line">
@@ -8075,7 +8075,7 @@
         </p:nvSpPr>
         <p:spPr>
           <a:xfrm flipV="1">
-            <a:off x="4323960" y="4713480"/>
+            <a:off x="4332960" y="4713480"/>
             <a:ext cx="0" cy="1758960"/>
           </a:xfrm>
           <a:prstGeom prst="line">
@@ -8118,7 +8118,7 @@
         </p:nvSpPr>
         <p:spPr>
           <a:xfrm flipV="1">
-            <a:off x="2028240" y="4713480"/>
+            <a:off x="2060280" y="4713480"/>
             <a:ext cx="0" cy="1758960"/>
           </a:xfrm>
           <a:prstGeom prst="line">
@@ -8161,8 +8161,8 @@
         </p:nvSpPr>
         <p:spPr>
           <a:xfrm>
-            <a:off x="2288160" y="4798440"/>
-            <a:ext cx="2926800" cy="170640"/>
+            <a:off x="2299320" y="4798440"/>
+            <a:ext cx="2915640" cy="170640"/>
           </a:xfrm>
           <a:custGeom>
             <a:avLst/>
@@ -8170,15 +8170,15 @@
             <a:ahLst/>
             <a:rect l="0" t="0" r="r" b="b"/>
             <a:pathLst>
-              <a:path w="8130" h="474">
+              <a:path w="8099" h="474">
                 <a:moveTo>
                   <a:pt x="0" y="0"/>
                 </a:moveTo>
                 <a:lnTo>
-                  <a:pt x="8130" y="0"/>
-                </a:lnTo>
-                <a:lnTo>
-                  <a:pt x="8130" y="474"/>
+                  <a:pt x="8099" y="0"/>
+                </a:lnTo>
+                <a:lnTo>
+                  <a:pt x="8099" y="474"/>
                 </a:lnTo>
                 <a:lnTo>
                   <a:pt x="0" y="474"/>
@@ -8221,8 +8221,8 @@
         </p:nvSpPr>
         <p:spPr>
           <a:xfrm>
-            <a:off x="3079440" y="5082120"/>
-            <a:ext cx="1901880" cy="170640"/>
+            <a:off x="3107160" y="5082120"/>
+            <a:ext cx="1876680" cy="170640"/>
           </a:xfrm>
           <a:custGeom>
             <a:avLst/>
@@ -8230,15 +8230,15 @@
             <a:ahLst/>
             <a:rect l="0" t="0" r="r" b="b"/>
             <a:pathLst>
-              <a:path w="5283" h="474">
+              <a:path w="5213" h="474">
                 <a:moveTo>
                   <a:pt x="0" y="0"/>
                 </a:moveTo>
                 <a:lnTo>
-                  <a:pt x="5283" y="0"/>
-                </a:lnTo>
-                <a:lnTo>
-                  <a:pt x="5283" y="474"/>
+                  <a:pt x="5213" y="0"/>
+                </a:lnTo>
+                <a:lnTo>
+                  <a:pt x="5213" y="474"/>
                 </a:lnTo>
                 <a:lnTo>
                   <a:pt x="0" y="474"/>
@@ -8281,8 +8281,8 @@
         </p:nvSpPr>
         <p:spPr>
           <a:xfrm>
-            <a:off x="2550240" y="5365800"/>
-            <a:ext cx="355320" cy="170640"/>
+            <a:off x="2571840" y="5365800"/>
+            <a:ext cx="357120" cy="170640"/>
           </a:xfrm>
           <a:custGeom>
             <a:avLst/>
@@ -8290,15 +8290,15 @@
             <a:ahLst/>
             <a:rect l="0" t="0" r="r" b="b"/>
             <a:pathLst>
-              <a:path w="987" h="474">
+              <a:path w="992" h="474">
                 <a:moveTo>
                   <a:pt x="0" y="0"/>
                 </a:moveTo>
                 <a:lnTo>
-                  <a:pt x="987" y="0"/>
-                </a:lnTo>
-                <a:lnTo>
-                  <a:pt x="987" y="474"/>
+                  <a:pt x="992" y="0"/>
+                </a:lnTo>
+                <a:lnTo>
+                  <a:pt x="992" y="474"/>
                 </a:lnTo>
                 <a:lnTo>
                   <a:pt x="0" y="474"/>
@@ -8341,8 +8341,8 @@
         </p:nvSpPr>
         <p:spPr>
           <a:xfrm>
-            <a:off x="2028240" y="5649480"/>
-            <a:ext cx="265320" cy="170640"/>
+            <a:off x="2060280" y="5649480"/>
+            <a:ext cx="292320" cy="170640"/>
           </a:xfrm>
           <a:custGeom>
             <a:avLst/>
@@ -8350,15 +8350,15 @@
             <a:ahLst/>
             <a:rect l="0" t="0" r="r" b="b"/>
             <a:pathLst>
-              <a:path w="737" h="474">
+              <a:path w="812" h="474">
                 <a:moveTo>
                   <a:pt x="0" y="0"/>
                 </a:moveTo>
                 <a:lnTo>
-                  <a:pt x="737" y="0"/>
-                </a:lnTo>
-                <a:lnTo>
-                  <a:pt x="737" y="474"/>
+                  <a:pt x="812" y="0"/>
+                </a:lnTo>
+                <a:lnTo>
+                  <a:pt x="812" y="474"/>
                 </a:lnTo>
                 <a:lnTo>
                   <a:pt x="0" y="474"/>
@@ -8401,7 +8401,307 @@
         </p:nvSpPr>
         <p:spPr>
           <a:xfrm>
-            <a:off x="2028240" y="5933160"/>
+            <a:off x="2060280" y="5933160"/>
+            <a:ext cx="244800" cy="170640"/>
+          </a:xfrm>
+          <a:custGeom>
+            <a:avLst/>
+            <a:gdLst/>
+            <a:ahLst/>
+            <a:rect l="0" t="0" r="r" b="b"/>
+            <a:pathLst>
+              <a:path w="680" h="474">
+                <a:moveTo>
+                  <a:pt x="0" y="0"/>
+                </a:moveTo>
+                <a:lnTo>
+                  <a:pt x="680" y="0"/>
+                </a:lnTo>
+                <a:lnTo>
+                  <a:pt x="680" y="474"/>
+                </a:lnTo>
+                <a:lnTo>
+                  <a:pt x="0" y="474"/>
+                </a:lnTo>
+                <a:lnTo>
+                  <a:pt x="0" y="0"/>
+                </a:lnTo>
+                <a:close/>
+              </a:path>
+            </a:pathLst>
+          </a:custGeom>
+          <a:solidFill>
+            <a:srgbClr val="0072B2"/>
+          </a:solidFill>
+          <a:ln w="0">
+            <a:noFill/>
+          </a:ln>
+        </p:spPr>
+        <p:txBody>
+          <a:bodyPr lIns="0" tIns="0" rIns="0" bIns="0" anchor="t">
+            <a:noAutofit/>
+          </a:bodyPr>
+          <a:p>
+            <a:endParaRPr lang="en-US" sz="2400" b="0" u="none" strike="noStrike">
+              <a:solidFill>
+                <a:srgbClr val="FFFFFF"/>
+              </a:solidFill>
+              <a:effectLst/>
+              <a:uFillTx/>
+              <a:latin typeface="Times New Roman"/>
+            </a:endParaRPr>
+          </a:p>
+        </p:txBody>
+      </p:sp>
+      <p:sp>
+        <p:nvSpPr>
+          <p:cNvPr id="171" name=""/>
+          <p:cNvSpPr/>
+          <p:nvPr/>
+        </p:nvSpPr>
+        <p:spPr>
+          <a:xfrm>
+            <a:off x="2121840" y="6216840"/>
+            <a:ext cx="14400" cy="170640"/>
+          </a:xfrm>
+          <a:custGeom>
+            <a:avLst/>
+            <a:gdLst/>
+            <a:ahLst/>
+            <a:rect l="0" t="0" r="r" b="b"/>
+            <a:pathLst>
+              <a:path w="40" h="474">
+                <a:moveTo>
+                  <a:pt x="0" y="0"/>
+                </a:moveTo>
+                <a:lnTo>
+                  <a:pt x="40" y="0"/>
+                </a:lnTo>
+                <a:lnTo>
+                  <a:pt x="40" y="474"/>
+                </a:lnTo>
+                <a:lnTo>
+                  <a:pt x="0" y="474"/>
+                </a:lnTo>
+                <a:lnTo>
+                  <a:pt x="0" y="0"/>
+                </a:lnTo>
+                <a:close/>
+              </a:path>
+            </a:pathLst>
+          </a:custGeom>
+          <a:solidFill>
+            <a:srgbClr val="0072B2"/>
+          </a:solidFill>
+          <a:ln w="0">
+            <a:noFill/>
+          </a:ln>
+        </p:spPr>
+        <p:txBody>
+          <a:bodyPr lIns="0" tIns="0" rIns="0" bIns="0" anchor="t">
+            <a:noAutofit/>
+          </a:bodyPr>
+          <a:p>
+            <a:endParaRPr lang="en-US" sz="2400" b="0" u="none" strike="noStrike">
+              <a:solidFill>
+                <a:srgbClr val="FFFFFF"/>
+              </a:solidFill>
+              <a:effectLst/>
+              <a:uFillTx/>
+              <a:latin typeface="Times New Roman"/>
+            </a:endParaRPr>
+          </a:p>
+        </p:txBody>
+      </p:sp>
+      <p:sp>
+        <p:nvSpPr>
+          <p:cNvPr id="172" name=""/>
+          <p:cNvSpPr/>
+          <p:nvPr/>
+        </p:nvSpPr>
+        <p:spPr>
+          <a:xfrm>
+            <a:off x="2060280" y="4798440"/>
+            <a:ext cx="239400" cy="170640"/>
+          </a:xfrm>
+          <a:custGeom>
+            <a:avLst/>
+            <a:gdLst/>
+            <a:ahLst/>
+            <a:rect l="0" t="0" r="r" b="b"/>
+            <a:pathLst>
+              <a:path w="665" h="474">
+                <a:moveTo>
+                  <a:pt x="0" y="0"/>
+                </a:moveTo>
+                <a:lnTo>
+                  <a:pt x="665" y="0"/>
+                </a:lnTo>
+                <a:lnTo>
+                  <a:pt x="665" y="474"/>
+                </a:lnTo>
+                <a:lnTo>
+                  <a:pt x="0" y="474"/>
+                </a:lnTo>
+                <a:lnTo>
+                  <a:pt x="0" y="0"/>
+                </a:lnTo>
+                <a:close/>
+              </a:path>
+            </a:pathLst>
+          </a:custGeom>
+          <a:solidFill>
+            <a:srgbClr val="F0E442"/>
+          </a:solidFill>
+          <a:ln w="0">
+            <a:noFill/>
+          </a:ln>
+        </p:spPr>
+        <p:txBody>
+          <a:bodyPr lIns="0" tIns="0" rIns="0" bIns="0" anchor="t">
+            <a:noAutofit/>
+          </a:bodyPr>
+          <a:p>
+            <a:endParaRPr lang="en-US" sz="2400" b="0" u="none" strike="noStrike">
+              <a:solidFill>
+                <a:srgbClr val="000000"/>
+              </a:solidFill>
+              <a:effectLst/>
+              <a:uFillTx/>
+              <a:latin typeface="Times New Roman"/>
+            </a:endParaRPr>
+          </a:p>
+        </p:txBody>
+      </p:sp>
+      <p:sp>
+        <p:nvSpPr>
+          <p:cNvPr id="173" name=""/>
+          <p:cNvSpPr/>
+          <p:nvPr/>
+        </p:nvSpPr>
+        <p:spPr>
+          <a:xfrm>
+            <a:off x="2060280" y="5082120"/>
+            <a:ext cx="1046880" cy="170640"/>
+          </a:xfrm>
+          <a:custGeom>
+            <a:avLst/>
+            <a:gdLst/>
+            <a:ahLst/>
+            <a:rect l="0" t="0" r="r" b="b"/>
+            <a:pathLst>
+              <a:path w="2908" h="474">
+                <a:moveTo>
+                  <a:pt x="0" y="0"/>
+                </a:moveTo>
+                <a:lnTo>
+                  <a:pt x="2908" y="0"/>
+                </a:lnTo>
+                <a:lnTo>
+                  <a:pt x="2908" y="474"/>
+                </a:lnTo>
+                <a:lnTo>
+                  <a:pt x="0" y="474"/>
+                </a:lnTo>
+                <a:lnTo>
+                  <a:pt x="0" y="0"/>
+                </a:lnTo>
+                <a:close/>
+              </a:path>
+            </a:pathLst>
+          </a:custGeom>
+          <a:solidFill>
+            <a:srgbClr val="F0E442"/>
+          </a:solidFill>
+          <a:ln w="0">
+            <a:noFill/>
+          </a:ln>
+        </p:spPr>
+        <p:txBody>
+          <a:bodyPr lIns="0" tIns="0" rIns="0" bIns="0" anchor="t">
+            <a:noAutofit/>
+          </a:bodyPr>
+          <a:p>
+            <a:endParaRPr lang="en-US" sz="2400" b="0" u="none" strike="noStrike">
+              <a:solidFill>
+                <a:srgbClr val="000000"/>
+              </a:solidFill>
+              <a:effectLst/>
+              <a:uFillTx/>
+              <a:latin typeface="Times New Roman"/>
+            </a:endParaRPr>
+          </a:p>
+        </p:txBody>
+      </p:sp>
+      <p:sp>
+        <p:nvSpPr>
+          <p:cNvPr id="174" name=""/>
+          <p:cNvSpPr/>
+          <p:nvPr/>
+        </p:nvSpPr>
+        <p:spPr>
+          <a:xfrm>
+            <a:off x="2060280" y="5365800"/>
+            <a:ext cx="511920" cy="170640"/>
+          </a:xfrm>
+          <a:custGeom>
+            <a:avLst/>
+            <a:gdLst/>
+            <a:ahLst/>
+            <a:rect l="0" t="0" r="r" b="b"/>
+            <a:pathLst>
+              <a:path w="1422" h="474">
+                <a:moveTo>
+                  <a:pt x="0" y="0"/>
+                </a:moveTo>
+                <a:lnTo>
+                  <a:pt x="1422" y="0"/>
+                </a:lnTo>
+                <a:lnTo>
+                  <a:pt x="1422" y="474"/>
+                </a:lnTo>
+                <a:lnTo>
+                  <a:pt x="0" y="474"/>
+                </a:lnTo>
+                <a:lnTo>
+                  <a:pt x="0" y="0"/>
+                </a:lnTo>
+                <a:close/>
+              </a:path>
+            </a:pathLst>
+          </a:custGeom>
+          <a:solidFill>
+            <a:srgbClr val="F0E442"/>
+          </a:solidFill>
+          <a:ln w="0">
+            <a:noFill/>
+          </a:ln>
+        </p:spPr>
+        <p:txBody>
+          <a:bodyPr lIns="0" tIns="0" rIns="0" bIns="0" anchor="t">
+            <a:noAutofit/>
+          </a:bodyPr>
+          <a:p>
+            <a:endParaRPr lang="en-US" sz="2400" b="0" u="none" strike="noStrike">
+              <a:solidFill>
+                <a:srgbClr val="000000"/>
+              </a:solidFill>
+              <a:effectLst/>
+              <a:uFillTx/>
+              <a:latin typeface="Times New Roman"/>
+            </a:endParaRPr>
+          </a:p>
+        </p:txBody>
+      </p:sp>
+      <p:sp>
+        <p:nvSpPr>
+          <p:cNvPr id="175" name=""/>
+          <p:cNvSpPr/>
+          <p:nvPr/>
+        </p:nvSpPr>
+        <p:spPr>
+          <a:xfrm>
+            <a:off x="1807560" y="5649480"/>
             <a:ext cx="253080" cy="170640"/>
           </a:xfrm>
           <a:custGeom>
@@ -8431,7 +8731,7 @@
             </a:pathLst>
           </a:custGeom>
           <a:solidFill>
-            <a:srgbClr val="0072B2"/>
+            <a:srgbClr val="F0E442"/>
           </a:solidFill>
           <a:ln w="0">
             <a:noFill/>
@@ -8444,25 +8744,25 @@
           <a:p>
             <a:endParaRPr lang="en-US" sz="2400" b="0" u="none" strike="noStrike">
               <a:solidFill>
-                <a:srgbClr val="FFFFFF"/>
-              </a:solidFill>
-              <a:effectLst/>
-              <a:uFillTx/>
-              <a:latin typeface="Times New Roman"/>
-            </a:endParaRPr>
-          </a:p>
-        </p:txBody>
-      </p:sp>
-      <p:sp>
-        <p:nvSpPr>
-          <p:cNvPr id="171" name=""/>
-          <p:cNvSpPr/>
-          <p:nvPr/>
-        </p:nvSpPr>
-        <p:spPr>
-          <a:xfrm>
-            <a:off x="2090520" y="6216840"/>
-            <a:ext cx="14400" cy="170640"/>
+                <a:srgbClr val="000000"/>
+              </a:solidFill>
+              <a:effectLst/>
+              <a:uFillTx/>
+              <a:latin typeface="Times New Roman"/>
+            </a:endParaRPr>
+          </a:p>
+        </p:txBody>
+      </p:sp>
+      <p:sp>
+        <p:nvSpPr>
+          <p:cNvPr id="176" name=""/>
+          <p:cNvSpPr/>
+          <p:nvPr/>
+        </p:nvSpPr>
+        <p:spPr>
+          <a:xfrm>
+            <a:off x="1911960" y="5933160"/>
+            <a:ext cx="148680" cy="170640"/>
           </a:xfrm>
           <a:custGeom>
             <a:avLst/>
@@ -8470,75 +8770,15 @@
             <a:ahLst/>
             <a:rect l="0" t="0" r="r" b="b"/>
             <a:pathLst>
-              <a:path w="40" h="474">
+              <a:path w="413" h="474">
                 <a:moveTo>
                   <a:pt x="0" y="0"/>
                 </a:moveTo>
                 <a:lnTo>
-                  <a:pt x="40" y="0"/>
-                </a:lnTo>
-                <a:lnTo>
-                  <a:pt x="40" y="474"/>
-                </a:lnTo>
-                <a:lnTo>
-                  <a:pt x="0" y="474"/>
-                </a:lnTo>
-                <a:lnTo>
-                  <a:pt x="0" y="0"/>
-                </a:lnTo>
-                <a:close/>
-              </a:path>
-            </a:pathLst>
-          </a:custGeom>
-          <a:solidFill>
-            <a:srgbClr val="0072B2"/>
-          </a:solidFill>
-          <a:ln w="0">
-            <a:noFill/>
-          </a:ln>
-        </p:spPr>
-        <p:txBody>
-          <a:bodyPr lIns="0" tIns="0" rIns="0" bIns="0" anchor="t">
-            <a:noAutofit/>
-          </a:bodyPr>
-          <a:p>
-            <a:endParaRPr lang="en-US" sz="2400" b="0" u="none" strike="noStrike">
-              <a:solidFill>
-                <a:srgbClr val="FFFFFF"/>
-              </a:solidFill>
-              <a:effectLst/>
-              <a:uFillTx/>
-              <a:latin typeface="Times New Roman"/>
-            </a:endParaRPr>
-          </a:p>
-        </p:txBody>
-      </p:sp>
-      <p:sp>
-        <p:nvSpPr>
-          <p:cNvPr id="172" name=""/>
-          <p:cNvSpPr/>
-          <p:nvPr/>
-        </p:nvSpPr>
-        <p:spPr>
-          <a:xfrm>
-            <a:off x="2028240" y="4798440"/>
-            <a:ext cx="260280" cy="170640"/>
-          </a:xfrm>
-          <a:custGeom>
-            <a:avLst/>
-            <a:gdLst/>
-            <a:ahLst/>
-            <a:rect l="0" t="0" r="r" b="b"/>
-            <a:pathLst>
-              <a:path w="723" h="474">
-                <a:moveTo>
-                  <a:pt x="0" y="0"/>
-                </a:moveTo>
-                <a:lnTo>
-                  <a:pt x="723" y="0"/>
-                </a:lnTo>
-                <a:lnTo>
-                  <a:pt x="723" y="474"/>
+                  <a:pt x="413" y="0"/>
+                </a:lnTo>
+                <a:lnTo>
+                  <a:pt x="413" y="474"/>
                 </a:lnTo>
                 <a:lnTo>
                   <a:pt x="0" y="474"/>
@@ -8575,14 +8815,14 @@
       </p:sp>
       <p:sp>
         <p:nvSpPr>
-          <p:cNvPr id="173" name=""/>
-          <p:cNvSpPr/>
-          <p:nvPr/>
-        </p:nvSpPr>
-        <p:spPr>
-          <a:xfrm>
-            <a:off x="2028240" y="5082120"/>
-            <a:ext cx="1051560" cy="170640"/>
+          <p:cNvPr id="177" name=""/>
+          <p:cNvSpPr/>
+          <p:nvPr/>
+        </p:nvSpPr>
+        <p:spPr>
+          <a:xfrm>
+            <a:off x="2060280" y="6216840"/>
+            <a:ext cx="61920" cy="170640"/>
           </a:xfrm>
           <a:custGeom>
             <a:avLst/>
@@ -8590,255 +8830,15 @@
             <a:ahLst/>
             <a:rect l="0" t="0" r="r" b="b"/>
             <a:pathLst>
-              <a:path w="2921" h="474">
+              <a:path w="172" h="474">
                 <a:moveTo>
                   <a:pt x="0" y="0"/>
                 </a:moveTo>
                 <a:lnTo>
-                  <a:pt x="2921" y="0"/>
-                </a:lnTo>
-                <a:lnTo>
-                  <a:pt x="2921" y="474"/>
-                </a:lnTo>
-                <a:lnTo>
-                  <a:pt x="0" y="474"/>
-                </a:lnTo>
-                <a:lnTo>
-                  <a:pt x="0" y="0"/>
-                </a:lnTo>
-                <a:close/>
-              </a:path>
-            </a:pathLst>
-          </a:custGeom>
-          <a:solidFill>
-            <a:srgbClr val="F0E442"/>
-          </a:solidFill>
-          <a:ln w="0">
-            <a:noFill/>
-          </a:ln>
-        </p:spPr>
-        <p:txBody>
-          <a:bodyPr lIns="0" tIns="0" rIns="0" bIns="0" anchor="t">
-            <a:noAutofit/>
-          </a:bodyPr>
-          <a:p>
-            <a:endParaRPr lang="en-US" sz="2400" b="0" u="none" strike="noStrike">
-              <a:solidFill>
-                <a:srgbClr val="000000"/>
-              </a:solidFill>
-              <a:effectLst/>
-              <a:uFillTx/>
-              <a:latin typeface="Times New Roman"/>
-            </a:endParaRPr>
-          </a:p>
-        </p:txBody>
-      </p:sp>
-      <p:sp>
-        <p:nvSpPr>
-          <p:cNvPr id="174" name=""/>
-          <p:cNvSpPr/>
-          <p:nvPr/>
-        </p:nvSpPr>
-        <p:spPr>
-          <a:xfrm>
-            <a:off x="2028240" y="5365800"/>
-            <a:ext cx="522360" cy="170640"/>
-          </a:xfrm>
-          <a:custGeom>
-            <a:avLst/>
-            <a:gdLst/>
-            <a:ahLst/>
-            <a:rect l="0" t="0" r="r" b="b"/>
-            <a:pathLst>
-              <a:path w="1451" h="474">
-                <a:moveTo>
-                  <a:pt x="0" y="0"/>
-                </a:moveTo>
-                <a:lnTo>
-                  <a:pt x="1451" y="0"/>
-                </a:lnTo>
-                <a:lnTo>
-                  <a:pt x="1451" y="474"/>
-                </a:lnTo>
-                <a:lnTo>
-                  <a:pt x="0" y="474"/>
-                </a:lnTo>
-                <a:lnTo>
-                  <a:pt x="0" y="0"/>
-                </a:lnTo>
-                <a:close/>
-              </a:path>
-            </a:pathLst>
-          </a:custGeom>
-          <a:solidFill>
-            <a:srgbClr val="F0E442"/>
-          </a:solidFill>
-          <a:ln w="0">
-            <a:noFill/>
-          </a:ln>
-        </p:spPr>
-        <p:txBody>
-          <a:bodyPr lIns="0" tIns="0" rIns="0" bIns="0" anchor="t">
-            <a:noAutofit/>
-          </a:bodyPr>
-          <a:p>
-            <a:endParaRPr lang="en-US" sz="2400" b="0" u="none" strike="noStrike">
-              <a:solidFill>
-                <a:srgbClr val="000000"/>
-              </a:solidFill>
-              <a:effectLst/>
-              <a:uFillTx/>
-              <a:latin typeface="Times New Roman"/>
-            </a:endParaRPr>
-          </a:p>
-        </p:txBody>
-      </p:sp>
-      <p:sp>
-        <p:nvSpPr>
-          <p:cNvPr id="175" name=""/>
-          <p:cNvSpPr/>
-          <p:nvPr/>
-        </p:nvSpPr>
-        <p:spPr>
-          <a:xfrm>
-            <a:off x="1807560" y="5649480"/>
-            <a:ext cx="221040" cy="170640"/>
-          </a:xfrm>
-          <a:custGeom>
-            <a:avLst/>
-            <a:gdLst/>
-            <a:ahLst/>
-            <a:rect l="0" t="0" r="r" b="b"/>
-            <a:pathLst>
-              <a:path w="614" h="474">
-                <a:moveTo>
-                  <a:pt x="0" y="0"/>
-                </a:moveTo>
-                <a:lnTo>
-                  <a:pt x="614" y="0"/>
-                </a:lnTo>
-                <a:lnTo>
-                  <a:pt x="614" y="474"/>
-                </a:lnTo>
-                <a:lnTo>
-                  <a:pt x="0" y="474"/>
-                </a:lnTo>
-                <a:lnTo>
-                  <a:pt x="0" y="0"/>
-                </a:lnTo>
-                <a:close/>
-              </a:path>
-            </a:pathLst>
-          </a:custGeom>
-          <a:solidFill>
-            <a:srgbClr val="F0E442"/>
-          </a:solidFill>
-          <a:ln w="0">
-            <a:noFill/>
-          </a:ln>
-        </p:spPr>
-        <p:txBody>
-          <a:bodyPr lIns="0" tIns="0" rIns="0" bIns="0" anchor="t">
-            <a:noAutofit/>
-          </a:bodyPr>
-          <a:p>
-            <a:endParaRPr lang="en-US" sz="2400" b="0" u="none" strike="noStrike">
-              <a:solidFill>
-                <a:srgbClr val="000000"/>
-              </a:solidFill>
-              <a:effectLst/>
-              <a:uFillTx/>
-              <a:latin typeface="Times New Roman"/>
-            </a:endParaRPr>
-          </a:p>
-        </p:txBody>
-      </p:sp>
-      <p:sp>
-        <p:nvSpPr>
-          <p:cNvPr id="176" name=""/>
-          <p:cNvSpPr/>
-          <p:nvPr/>
-        </p:nvSpPr>
-        <p:spPr>
-          <a:xfrm>
-            <a:off x="1872360" y="5933160"/>
-            <a:ext cx="156240" cy="170640"/>
-          </a:xfrm>
-          <a:custGeom>
-            <a:avLst/>
-            <a:gdLst/>
-            <a:ahLst/>
-            <a:rect l="0" t="0" r="r" b="b"/>
-            <a:pathLst>
-              <a:path w="434" h="474">
-                <a:moveTo>
-                  <a:pt x="0" y="0"/>
-                </a:moveTo>
-                <a:lnTo>
-                  <a:pt x="434" y="0"/>
-                </a:lnTo>
-                <a:lnTo>
-                  <a:pt x="434" y="474"/>
-                </a:lnTo>
-                <a:lnTo>
-                  <a:pt x="0" y="474"/>
-                </a:lnTo>
-                <a:lnTo>
-                  <a:pt x="0" y="0"/>
-                </a:lnTo>
-                <a:close/>
-              </a:path>
-            </a:pathLst>
-          </a:custGeom>
-          <a:solidFill>
-            <a:srgbClr val="F0E442"/>
-          </a:solidFill>
-          <a:ln w="0">
-            <a:noFill/>
-          </a:ln>
-        </p:spPr>
-        <p:txBody>
-          <a:bodyPr lIns="0" tIns="0" rIns="0" bIns="0" anchor="t">
-            <a:noAutofit/>
-          </a:bodyPr>
-          <a:p>
-            <a:endParaRPr lang="en-US" sz="2400" b="0" u="none" strike="noStrike">
-              <a:solidFill>
-                <a:srgbClr val="000000"/>
-              </a:solidFill>
-              <a:effectLst/>
-              <a:uFillTx/>
-              <a:latin typeface="Times New Roman"/>
-            </a:endParaRPr>
-          </a:p>
-        </p:txBody>
-      </p:sp>
-      <p:sp>
-        <p:nvSpPr>
-          <p:cNvPr id="177" name=""/>
-          <p:cNvSpPr/>
-          <p:nvPr/>
-        </p:nvSpPr>
-        <p:spPr>
-          <a:xfrm>
-            <a:off x="2028240" y="6216840"/>
-            <a:ext cx="62640" cy="170640"/>
-          </a:xfrm>
-          <a:custGeom>
-            <a:avLst/>
-            <a:gdLst/>
-            <a:ahLst/>
-            <a:rect l="0" t="0" r="r" b="b"/>
-            <a:pathLst>
-              <a:path w="174" h="474">
-                <a:moveTo>
-                  <a:pt x="0" y="0"/>
-                </a:moveTo>
-                <a:lnTo>
-                  <a:pt x="174" y="0"/>
-                </a:lnTo>
-                <a:lnTo>
-                  <a:pt x="174" y="474"/>
+                  <a:pt x="172" y="0"/>
+                </a:lnTo>
+                <a:lnTo>
+                  <a:pt x="172" y="474"/>
                 </a:lnTo>
                 <a:lnTo>
                   <a:pt x="0" y="474"/>
@@ -9513,7 +9513,7 @@
         </p:nvSpPr>
         <p:spPr>
           <a:xfrm flipV="1">
-            <a:off x="2028240" y="6472440"/>
+            <a:off x="2060280" y="6472440"/>
             <a:ext cx="0" cy="31320"/>
           </a:xfrm>
           <a:prstGeom prst="line">
@@ -9556,7 +9556,7 @@
         </p:nvSpPr>
         <p:spPr>
           <a:xfrm flipV="1">
-            <a:off x="3175920" y="6472440"/>
+            <a:off x="3196800" y="6472440"/>
             <a:ext cx="0" cy="31320"/>
           </a:xfrm>
           <a:prstGeom prst="line">
@@ -9599,7 +9599,7 @@
         </p:nvSpPr>
         <p:spPr>
           <a:xfrm flipV="1">
-            <a:off x="4323960" y="6472440"/>
+            <a:off x="4332960" y="6472440"/>
             <a:ext cx="0" cy="31320"/>
           </a:xfrm>
           <a:prstGeom prst="line">
@@ -9690,7 +9690,7 @@
         </p:nvSpPr>
         <p:spPr>
           <a:xfrm>
-            <a:off x="2003040" y="6516720"/>
+            <a:off x="2035080" y="6516720"/>
             <a:ext cx="101160" cy="102600"/>
           </a:xfrm>
           <a:prstGeom prst="rect">
@@ -9738,7 +9738,7 @@
         </p:nvSpPr>
         <p:spPr>
           <a:xfrm>
-            <a:off x="3150720" y="6516720"/>
+            <a:off x="3171600" y="6516720"/>
             <a:ext cx="101160" cy="102600"/>
           </a:xfrm>
           <a:prstGeom prst="rect">
@@ -9786,7 +9786,7 @@
         </p:nvSpPr>
         <p:spPr>
           <a:xfrm>
-            <a:off x="4298760" y="6516720"/>
+            <a:off x="4307760" y="6516720"/>
             <a:ext cx="101160" cy="102600"/>
           </a:xfrm>
           <a:prstGeom prst="rect">
@@ -10649,8 +10649,8 @@
         </p:nvSpPr>
         <p:spPr>
           <a:xfrm>
-            <a:off x="8325000" y="6216840"/>
-            <a:ext cx="341280" cy="170640"/>
+            <a:off x="8330040" y="6216840"/>
+            <a:ext cx="336240" cy="170640"/>
           </a:xfrm>
           <a:custGeom>
             <a:avLst/>
@@ -10658,15 +10658,15 @@
             <a:ahLst/>
             <a:rect l="0" t="0" r="r" b="b"/>
             <a:pathLst>
-              <a:path w="948" h="474">
+              <a:path w="934" h="474">
                 <a:moveTo>
                   <a:pt x="0" y="0"/>
                 </a:moveTo>
                 <a:lnTo>
-                  <a:pt x="948" y="0"/>
-                </a:lnTo>
-                <a:lnTo>
-                  <a:pt x="948" y="474"/>
+                  <a:pt x="934" y="0"/>
+                </a:lnTo>
+                <a:lnTo>
+                  <a:pt x="934" y="474"/>
                 </a:lnTo>
                 <a:lnTo>
                   <a:pt x="0" y="474"/>
@@ -10709,8 +10709,8 @@
         </p:nvSpPr>
         <p:spPr>
           <a:xfrm>
-            <a:off x="8518680" y="5933160"/>
-            <a:ext cx="147600" cy="170640"/>
+            <a:off x="8519760" y="5933160"/>
+            <a:ext cx="146520" cy="170640"/>
           </a:xfrm>
           <a:custGeom>
             <a:avLst/>
@@ -10718,15 +10718,15 @@
             <a:ahLst/>
             <a:rect l="0" t="0" r="r" b="b"/>
             <a:pathLst>
-              <a:path w="410" h="474">
+              <a:path w="407" h="474">
                 <a:moveTo>
                   <a:pt x="0" y="0"/>
                 </a:moveTo>
                 <a:lnTo>
-                  <a:pt x="410" y="0"/>
-                </a:lnTo>
-                <a:lnTo>
-                  <a:pt x="410" y="474"/>
+                  <a:pt x="407" y="0"/>
+                </a:lnTo>
+                <a:lnTo>
+                  <a:pt x="407" y="474"/>
                 </a:lnTo>
                 <a:lnTo>
                   <a:pt x="0" y="474"/>
@@ -10830,7 +10830,7 @@
         <p:spPr>
           <a:xfrm>
             <a:off x="8665920" y="5365800"/>
-            <a:ext cx="199800" cy="170640"/>
+            <a:ext cx="198720" cy="170640"/>
           </a:xfrm>
           <a:custGeom>
             <a:avLst/>
@@ -10838,15 +10838,15 @@
             <a:ahLst/>
             <a:rect l="0" t="0" r="r" b="b"/>
             <a:pathLst>
-              <a:path w="555" h="474">
+              <a:path w="552" h="474">
                 <a:moveTo>
                   <a:pt x="0" y="0"/>
                 </a:moveTo>
                 <a:lnTo>
-                  <a:pt x="555" y="0"/>
-                </a:lnTo>
-                <a:lnTo>
-                  <a:pt x="555" y="474"/>
+                  <a:pt x="552" y="0"/>
+                </a:lnTo>
+                <a:lnTo>
+                  <a:pt x="552" y="474"/>
                 </a:lnTo>
                 <a:lnTo>
                   <a:pt x="0" y="474"/>
@@ -10890,7 +10890,7 @@
         <p:spPr>
           <a:xfrm>
             <a:off x="8665920" y="5082120"/>
-            <a:ext cx="620280" cy="170640"/>
+            <a:ext cx="617040" cy="170640"/>
           </a:xfrm>
           <a:custGeom>
             <a:avLst/>
@@ -10898,15 +10898,15 @@
             <a:ahLst/>
             <a:rect l="0" t="0" r="r" b="b"/>
             <a:pathLst>
-              <a:path w="1723" h="474">
+              <a:path w="1714" h="474">
                 <a:moveTo>
                   <a:pt x="0" y="0"/>
                 </a:moveTo>
                 <a:lnTo>
-                  <a:pt x="1723" y="0"/>
-                </a:lnTo>
-                <a:lnTo>
-                  <a:pt x="1723" y="474"/>
+                  <a:pt x="1714" y="0"/>
+                </a:lnTo>
+                <a:lnTo>
+                  <a:pt x="1714" y="474"/>
                 </a:lnTo>
                 <a:lnTo>
                   <a:pt x="0" y="474"/>
@@ -10950,7 +10950,7 @@
         <p:spPr>
           <a:xfrm>
             <a:off x="8665920" y="4798440"/>
-            <a:ext cx="816120" cy="170640"/>
+            <a:ext cx="806400" cy="170640"/>
           </a:xfrm>
           <a:custGeom>
             <a:avLst/>
@@ -10958,15 +10958,15 @@
             <a:ahLst/>
             <a:rect l="0" t="0" r="r" b="b"/>
             <a:pathLst>
-              <a:path w="2267" h="474">
+              <a:path w="2240" h="474">
                 <a:moveTo>
                   <a:pt x="0" y="0"/>
                 </a:moveTo>
                 <a:lnTo>
-                  <a:pt x="2267" y="0"/>
-                </a:lnTo>
-                <a:lnTo>
-                  <a:pt x="2267" y="474"/>
+                  <a:pt x="2240" y="0"/>
+                </a:lnTo>
+                <a:lnTo>
+                  <a:pt x="2240" y="474"/>
                 </a:lnTo>
                 <a:lnTo>
                   <a:pt x="0" y="474"/>
@@ -11057,7 +11057,7 @@
         </p:nvSpPr>
         <p:spPr>
           <a:xfrm>
-            <a:off x="7651800" y="6270480"/>
+            <a:off x="7656840" y="6270480"/>
             <a:ext cx="639360" cy="79560"/>
           </a:xfrm>
           <a:prstGeom prst="rect">
@@ -11105,7 +11105,7 @@
         </p:nvSpPr>
         <p:spPr>
           <a:xfrm>
-            <a:off x="7845840" y="5986800"/>
+            <a:off x="7846560" y="5986800"/>
             <a:ext cx="639360" cy="79560"/>
           </a:xfrm>
           <a:prstGeom prst="rect">
@@ -11132,7 +11132,7 @@
                 <a:latin typeface="Arial"/>
                 <a:ea typeface="Arial"/>
               </a:rPr>
-              <a:t>r = -0.06, P = 0.76</a:t>
+              <a:t>r = -0.06, P = 0.77</a:t>
             </a:r>
             <a:endParaRPr lang="en-US" sz="620" b="0" u="none" strike="noStrike">
               <a:solidFill>
@@ -11153,7 +11153,7 @@
         </p:nvSpPr>
         <p:spPr>
           <a:xfrm>
-            <a:off x="7865280" y="5703120"/>
+            <a:off x="7864920" y="5703120"/>
             <a:ext cx="639360" cy="79560"/>
           </a:xfrm>
           <a:prstGeom prst="rect">
@@ -11201,7 +11201,7 @@
         </p:nvSpPr>
         <p:spPr>
           <a:xfrm>
-            <a:off x="8902080" y="5419440"/>
+            <a:off x="8901000" y="5419440"/>
             <a:ext cx="613080" cy="79560"/>
           </a:xfrm>
           <a:prstGeom prst="rect">
@@ -11228,7 +11228,7 @@
                 <a:latin typeface="Arial"/>
                 <a:ea typeface="Arial"/>
               </a:rPr>
-              <a:t>r = 0.08, P = 0.68</a:t>
+              <a:t>r = 0.08, P = 0.69</a:t>
             </a:r>
             <a:endParaRPr lang="en-US" sz="620" b="0" u="none" strike="noStrike">
               <a:solidFill>
@@ -11249,7 +11249,7 @@
         </p:nvSpPr>
         <p:spPr>
           <a:xfrm>
-            <a:off x="9322560" y="5135760"/>
+            <a:off x="9319320" y="5135760"/>
             <a:ext cx="613080" cy="79560"/>
           </a:xfrm>
           <a:prstGeom prst="rect">
@@ -11340,7 +11340,7 @@
         </p:nvSpPr>
         <p:spPr>
           <a:xfrm>
-            <a:off x="9518040" y="4852080"/>
+            <a:off x="9509040" y="4852080"/>
             <a:ext cx="613080" cy="79560"/>
           </a:xfrm>
           <a:prstGeom prst="rect">
